--- a/Kosta_Hetagurov.pptx
+++ b/Kosta_Hetagurov.pptx
@@ -3308,7 +3308,7 @@
         <p:spPr>
           <a:xfrm>
             <a:off x="640080" y="4572000"/>
-            <a:ext cx="5669280" cy="1280160"/>
+            <a:ext cx="5669280" cy="1737360"/>
           </a:xfrm>
           <a:prstGeom prst="rect">
             <a:avLst/>
@@ -3323,29 +3323,41 @@
           <a:p>
             <a:pPr algn="l"/>
             <a:r>
-              <a:rPr sz="1700" b="0" i="0">
+              <a:rPr sz="1600" b="0" i="0">
                 <a:solidFill>
                   <a:srgbClr val="23262B"/>
                 </a:solidFill>
                 <a:latin typeface="Calibri"/>
               </a:rPr>
-              <a:t>поэт • художник • просветитель</a:t>
+              <a:t>основоположник осетинской литературы</a:t>
+            </a:r>
+          </a:p>
+          <a:p>
+            <a:pPr algn="l"/>
+            <a:r>
+              <a:rPr sz="1600" b="0" i="0">
+                <a:solidFill>
+                  <a:srgbClr val="23262B"/>
+                </a:solidFill>
+                <a:latin typeface="Calibri"/>
+              </a:rPr>
+              <a:t>и осетинского литературного языка</a:t>
             </a:r>
           </a:p>
           <a:p>
             <a:pPr algn="l">
               <a:spcBef>
-                <a:spcPts val="400"/>
+                <a:spcPts val="600"/>
               </a:spcBef>
             </a:pPr>
             <a:r>
-              <a:rPr sz="1400" b="0" i="0">
+              <a:rPr sz="1300" b="0" i="0">
                 <a:solidFill>
                   <a:srgbClr val="8A8578"/>
                 </a:solidFill>
                 <a:latin typeface="Calibri"/>
               </a:rPr>
-              <a:t>основоположник осетинской литературы</a:t>
+              <a:t>поэт • художник • публицист • этнограф</a:t>
             </a:r>
           </a:p>
         </p:txBody>
@@ -3745,8 +3757,8 @@
         </p:nvSpPr>
         <p:spPr>
           <a:xfrm>
-            <a:off x="0" y="5897880"/>
-            <a:ext cx="12192000" cy="960120"/>
+            <a:off x="0" y="5440680"/>
+            <a:ext cx="12192000" cy="1417320"/>
           </a:xfrm>
           <a:prstGeom prst="rect">
             <a:avLst/>
@@ -3791,8 +3803,8 @@
         </p:nvSpPr>
         <p:spPr>
           <a:xfrm>
-            <a:off x="548640" y="5943600"/>
-            <a:ext cx="11091672" cy="868680"/>
+            <a:off x="548640" y="5486400"/>
+            <a:ext cx="11091672" cy="1325880"/>
           </a:xfrm>
           <a:prstGeom prst="rect">
             <a:avLst/>
@@ -3819,17 +3831,33 @@
           <a:p>
             <a:pPr algn="ctr">
               <a:spcBef>
-                <a:spcPts val="400"/>
+                <a:spcPts val="300"/>
               </a:spcBef>
             </a:pPr>
             <a:r>
-              <a:rPr sz="1400" b="0" i="0">
+              <a:rPr sz="1300" b="0" i="0">
                 <a:solidFill>
                   <a:srgbClr val="D8CEBE"/>
                 </a:solidFill>
                 <a:latin typeface="Calibri"/>
               </a:rPr>
-              <a:t>центральное место города, у гор и Терека</a:t>
+              <a:t>Прах поэта народ перенёс сюда и схоронил на Осетинской горке.</a:t>
+            </a:r>
+          </a:p>
+          <a:p>
+            <a:pPr algn="ctr">
+              <a:spcBef>
+                <a:spcPts val="300"/>
+              </a:spcBef>
+            </a:pPr>
+            <a:r>
+              <a:rPr sz="1300" b="0" i="0">
+                <a:solidFill>
+                  <a:srgbClr val="D8CEBE"/>
+                </a:solidFill>
+                <a:latin typeface="Calibri"/>
+              </a:rPr>
+              <a:t>Именем Коста названы центральный парк, улицы и театр.</a:t>
             </a:r>
           </a:p>
         </p:txBody>
@@ -4097,8 +4125,8 @@
         </p:nvSpPr>
         <p:spPr>
           <a:xfrm>
-            <a:off x="0" y="5897880"/>
-            <a:ext cx="12192000" cy="960120"/>
+            <a:off x="0" y="5440680"/>
+            <a:ext cx="12192000" cy="1417320"/>
           </a:xfrm>
           <a:prstGeom prst="rect">
             <a:avLst/>
@@ -4143,8 +4171,8 @@
         </p:nvSpPr>
         <p:spPr>
           <a:xfrm>
-            <a:off x="548640" y="5943600"/>
-            <a:ext cx="11091672" cy="868680"/>
+            <a:off x="548640" y="5486400"/>
+            <a:ext cx="11091672" cy="1325880"/>
           </a:xfrm>
           <a:prstGeom prst="rect">
             <a:avLst/>
@@ -4171,17 +4199,33 @@
           <a:p>
             <a:pPr algn="ctr">
               <a:spcBef>
-                <a:spcPts val="400"/>
+                <a:spcPts val="300"/>
               </a:spcBef>
             </a:pPr>
             <a:r>
-              <a:rPr sz="1400" b="0" i="0">
+              <a:rPr sz="1300" b="0" i="0">
                 <a:solidFill>
                   <a:srgbClr val="D8CEBE"/>
                 </a:solidFill>
                 <a:latin typeface="Calibri"/>
               </a:rPr>
-              <a:t>имя Коста носят улицы, театры и сёла по всему Кавказу</a:t>
+              <a:t>Имя поэта носят университеты, сёла и улицы по всему Кавказу,</a:t>
+            </a:r>
+          </a:p>
+          <a:p>
+            <a:pPr algn="ctr">
+              <a:spcBef>
+                <a:spcPts val="300"/>
+              </a:spcBef>
+            </a:pPr>
+            <a:r>
+              <a:rPr sz="1300" b="0" i="0">
+                <a:solidFill>
+                  <a:srgbClr val="D8CEBE"/>
+                </a:solidFill>
+                <a:latin typeface="Calibri"/>
+              </a:rPr>
+              <a:t>а его «Ирон фæндыр» переведён на десятки языков мира.</a:t>
             </a:r>
           </a:p>
         </p:txBody>
@@ -4546,7 +4590,7 @@
         <p:spPr>
           <a:xfrm>
             <a:off x="5120640" y="4114800"/>
-            <a:ext cx="6217920" cy="822960"/>
+            <a:ext cx="6217920" cy="1463040"/>
           </a:xfrm>
           <a:prstGeom prst="rect">
             <a:avLst/>
@@ -4568,6 +4612,34 @@
                 <a:latin typeface="Calibri"/>
               </a:rPr>
               <a:t>Коста Хетагуров, 1859—1906</a:t>
+            </a:r>
+          </a:p>
+          <a:p>
+            <a:pPr algn="l">
+              <a:spcBef>
+                <a:spcPts val="1000"/>
+              </a:spcBef>
+            </a:pPr>
+            <a:r>
+              <a:rPr sz="1400" b="0" i="0">
+                <a:solidFill>
+                  <a:srgbClr val="8A8578"/>
+                </a:solidFill>
+                <a:latin typeface="Calibri"/>
+              </a:rPr>
+              <a:t>Он прожил 46 лет, но на века дал своему народу</a:t>
+            </a:r>
+          </a:p>
+          <a:p>
+            <a:pPr algn="l"/>
+            <a:r>
+              <a:rPr sz="1400" b="0" i="0">
+                <a:solidFill>
+                  <a:srgbClr val="8A8578"/>
+                </a:solidFill>
+                <a:latin typeface="Calibri"/>
+              </a:rPr>
+              <a:t>литературу, язык и голос.</a:t>
             </a:r>
           </a:p>
         </p:txBody>
@@ -4938,7 +5010,7 @@
         <p:spPr>
           <a:xfrm>
             <a:off x="5486400" y="3108960"/>
-            <a:ext cx="6035040" cy="2011680"/>
+            <a:ext cx="6035040" cy="2926080"/>
           </a:xfrm>
           <a:prstGeom prst="rect">
             <a:avLst/>
@@ -4953,37 +5025,81 @@
           <a:p>
             <a:pPr algn="l"/>
             <a:r>
-              <a:rPr sz="1700" b="0" i="0">
+              <a:rPr sz="1600" b="0" i="0">
                 <a:solidFill>
                   <a:srgbClr val="D8CEBE"/>
                 </a:solidFill>
                 <a:latin typeface="Calibri"/>
               </a:rPr>
-              <a:t>осетинский поэт и художник,</a:t>
-            </a:r>
-          </a:p>
-          <a:p>
-            <a:pPr algn="l"/>
-            <a:r>
-              <a:rPr sz="1700" b="0" i="0">
+              <a:t>Родился 15 октября 1859 года</a:t>
+            </a:r>
+          </a:p>
+          <a:p>
+            <a:pPr algn="l">
+              <a:spcAft>
+                <a:spcPts val="1000"/>
+              </a:spcAft>
+            </a:pPr>
+            <a:r>
+              <a:rPr sz="1600" b="0" i="0">
                 <a:solidFill>
                   <a:srgbClr val="D8CEBE"/>
                 </a:solidFill>
                 <a:latin typeface="Calibri"/>
               </a:rPr>
-              <a:t>основоположник осетинского</a:t>
+              <a:t>в горном ауле Нар.</a:t>
             </a:r>
           </a:p>
           <a:p>
             <a:pPr algn="l"/>
             <a:r>
-              <a:rPr sz="1700" b="0" i="0">
+              <a:rPr sz="1600" b="0" i="0">
                 <a:solidFill>
                   <a:srgbClr val="D8CEBE"/>
                 </a:solidFill>
                 <a:latin typeface="Calibri"/>
               </a:rPr>
-              <a:t>литературного языка</a:t>
+              <a:t>Учился живописи в Петербургской</a:t>
+            </a:r>
+          </a:p>
+          <a:p>
+            <a:pPr algn="l">
+              <a:spcAft>
+                <a:spcPts val="1000"/>
+              </a:spcAft>
+            </a:pPr>
+            <a:r>
+              <a:rPr sz="1600" b="0" i="0">
+                <a:solidFill>
+                  <a:srgbClr val="D8CEBE"/>
+                </a:solidFill>
+                <a:latin typeface="Calibri"/>
+              </a:rPr>
+              <a:t>академии художеств.</a:t>
+            </a:r>
+          </a:p>
+          <a:p>
+            <a:pPr algn="l"/>
+            <a:r>
+              <a:rPr sz="1600" b="0" i="0">
+                <a:solidFill>
+                  <a:srgbClr val="D8CEBE"/>
+                </a:solidFill>
+                <a:latin typeface="Calibri"/>
+              </a:rPr>
+              <a:t>Подарил осетинскому народу</a:t>
+            </a:r>
+          </a:p>
+          <a:p>
+            <a:pPr algn="l"/>
+            <a:r>
+              <a:rPr sz="1600" b="0" i="0">
+                <a:solidFill>
+                  <a:srgbClr val="D8CEBE"/>
+                </a:solidFill>
+                <a:latin typeface="Calibri"/>
+              </a:rPr>
+              <a:t>литературный язык и поэзию.</a:t>
             </a:r>
           </a:p>
         </p:txBody>
@@ -5330,8 +5446,8 @@
         </p:nvSpPr>
         <p:spPr>
           <a:xfrm>
-            <a:off x="0" y="5897880"/>
-            <a:ext cx="12192000" cy="960120"/>
+            <a:off x="0" y="5440680"/>
+            <a:ext cx="12192000" cy="1417320"/>
           </a:xfrm>
           <a:prstGeom prst="rect">
             <a:avLst/>
@@ -5376,8 +5492,8 @@
         </p:nvSpPr>
         <p:spPr>
           <a:xfrm>
-            <a:off x="548640" y="5943600"/>
-            <a:ext cx="11091672" cy="868680"/>
+            <a:off x="548640" y="5486400"/>
+            <a:ext cx="11091672" cy="1325880"/>
           </a:xfrm>
           <a:prstGeom prst="rect">
             <a:avLst/>
@@ -5404,17 +5520,33 @@
           <a:p>
             <a:pPr algn="ctr">
               <a:spcBef>
-                <a:spcPts val="400"/>
+                <a:spcPts val="300"/>
               </a:spcBef>
             </a:pPr>
             <a:r>
-              <a:rPr sz="1400" b="0" i="0">
+              <a:rPr sz="1300" b="0" i="0">
                 <a:solidFill>
                   <a:srgbClr val="D8CEBE"/>
                 </a:solidFill>
                 <a:latin typeface="Calibri"/>
               </a:rPr>
-              <a:t>15 октября 1859, Мамисонское ущелье</a:t>
+              <a:t>Здесь 15 октября 1859 года в семье офицера русской армии родился Коста.</a:t>
+            </a:r>
+          </a:p>
+          <a:p>
+            <a:pPr algn="ctr">
+              <a:spcBef>
+                <a:spcPts val="300"/>
+              </a:spcBef>
+            </a:pPr>
+            <a:r>
+              <a:rPr sz="1300" b="0" i="0">
+                <a:solidFill>
+                  <a:srgbClr val="D8CEBE"/>
+                </a:solidFill>
+                <a:latin typeface="Calibri"/>
+              </a:rPr>
+              <a:t>Горы Мамисонского ущелья стали главной темой его стихов и картин.</a:t>
             </a:r>
           </a:p>
         </p:txBody>
@@ -5767,7 +5899,7 @@
         <p:spPr>
           <a:xfrm>
             <a:off x="868680" y="2468880"/>
-            <a:ext cx="5486400" cy="3108960"/>
+            <a:ext cx="5486400" cy="3840480"/>
           </a:xfrm>
           <a:prstGeom prst="rect">
             <a:avLst/>
@@ -5780,47 +5912,83 @@
           </a:bodyPr>
           <a:lstStyle/>
           <a:p>
-            <a:pPr algn="l">
-              <a:spcAft>
-                <a:spcPts val="1400"/>
-              </a:spcAft>
-            </a:pPr>
-            <a:r>
-              <a:rPr sz="1900" b="0" i="0">
+            <a:pPr algn="l"/>
+            <a:r>
+              <a:rPr sz="1500" b="0" i="0">
                 <a:solidFill>
                   <a:srgbClr val="FFFFFF"/>
                 </a:solidFill>
                 <a:latin typeface="Calibri"/>
               </a:rPr>
-              <a:t>Владикавказская прогимназия</a:t>
+              <a:t>Владикавказская прогимназия и Ставропольская</a:t>
             </a:r>
           </a:p>
           <a:p>
             <a:pPr algn="l">
               <a:spcAft>
-                <a:spcPts val="1400"/>
+                <a:spcPts val="1200"/>
               </a:spcAft>
             </a:pPr>
             <a:r>
-              <a:rPr sz="1900" b="0" i="0">
+              <a:rPr sz="1500" b="0" i="0">
                 <a:solidFill>
                   <a:srgbClr val="FFFFFF"/>
                 </a:solidFill>
                 <a:latin typeface="Calibri"/>
               </a:rPr>
-              <a:t>Ставропольская гимназия</a:t>
+              <a:t>гимназия — здесь открылся дар к слову и кисти.</a:t>
             </a:r>
           </a:p>
           <a:p>
             <a:pPr algn="l"/>
             <a:r>
-              <a:rPr sz="1900" b="0" i="0">
+              <a:rPr sz="1500" b="0" i="0">
                 <a:solidFill>
                   <a:srgbClr val="C9A227"/>
                 </a:solidFill>
                 <a:latin typeface="Calibri"/>
               </a:rPr>
-              <a:t>Петербургская академия художеств, 1881</a:t>
+              <a:t>Петербургская академия художеств, 1881 —</a:t>
+            </a:r>
+          </a:p>
+          <a:p>
+            <a:pPr algn="l">
+              <a:spcAft>
+                <a:spcPts val="1200"/>
+              </a:spcAft>
+            </a:pPr>
+            <a:r>
+              <a:rPr sz="1500" b="0" i="0">
+                <a:solidFill>
+                  <a:srgbClr val="C9A227"/>
+                </a:solidFill>
+                <a:latin typeface="Calibri"/>
+              </a:rPr>
+              <a:t>мечта о живописи стала делом жизни.</a:t>
+            </a:r>
+          </a:p>
+          <a:p>
+            <a:pPr algn="l"/>
+            <a:r>
+              <a:rPr sz="1500" b="0" i="0">
+                <a:solidFill>
+                  <a:srgbClr val="FFFFFF"/>
+                </a:solidFill>
+                <a:latin typeface="Calibri"/>
+              </a:rPr>
+              <a:t>Из-за бедности покинул академию, но вернул</a:t>
+            </a:r>
+          </a:p>
+          <a:p>
+            <a:pPr algn="l"/>
+            <a:r>
+              <a:rPr sz="1500" b="0" i="0">
+                <a:solidFill>
+                  <a:srgbClr val="FFFFFF"/>
+                </a:solidFill>
+                <a:latin typeface="Calibri"/>
+              </a:rPr>
+              <a:t>живопись в Осетию: портрет, пейзаж, фреска.</a:t>
             </a:r>
           </a:p>
         </p:txBody>
@@ -6266,7 +6434,7 @@
         <p:spPr>
           <a:xfrm>
             <a:off x="1371600" y="3657600"/>
-            <a:ext cx="9445752" cy="640080"/>
+            <a:ext cx="9445752" cy="914400"/>
           </a:xfrm>
           <a:prstGeom prst="rect">
             <a:avLst/>
@@ -6281,13 +6449,25 @@
           <a:p>
             <a:pPr algn="ctr"/>
             <a:r>
-              <a:rPr sz="2000" b="0" i="0">
+              <a:rPr sz="1800" b="0" i="0">
                 <a:solidFill>
                   <a:srgbClr val="FFFFFF"/>
                 </a:solidFill>
                 <a:latin typeface="Calibri"/>
               </a:rPr>
-              <a:t>1899 — первый сборник осетинской поэзии</a:t>
+              <a:t>«Осетинская лира», 1899 — первый сборник осетинской поэзии,</a:t>
+            </a:r>
+          </a:p>
+          <a:p>
+            <a:pPr algn="ctr"/>
+            <a:r>
+              <a:rPr sz="1800" b="0" i="0">
+                <a:solidFill>
+                  <a:srgbClr val="FFFFFF"/>
+                </a:solidFill>
+                <a:latin typeface="Calibri"/>
+              </a:rPr>
+              <a:t>с него начинается осетинская литература и литературный язык</a:t>
             </a:r>
           </a:p>
         </p:txBody>
@@ -6300,8 +6480,8 @@
         </p:nvSpPr>
         <p:spPr>
           <a:xfrm>
-            <a:off x="1371600" y="4389120"/>
-            <a:ext cx="9445752" cy="640080"/>
+            <a:off x="1371600" y="4709160"/>
+            <a:ext cx="9445752" cy="822960"/>
           </a:xfrm>
           <a:prstGeom prst="rect">
             <a:avLst/>
@@ -6316,13 +6496,25 @@
           <a:p>
             <a:pPr algn="ctr"/>
             <a:r>
-              <a:rPr sz="1500" b="0" i="0">
+              <a:rPr sz="1400" b="0" i="0">
                 <a:solidFill>
                   <a:srgbClr val="8A8578"/>
                 </a:solidFill>
                 <a:latin typeface="Calibri"/>
               </a:rPr>
-              <a:t>стихотворение «Завещание» переведено на 108 языков</a:t>
+              <a:t>В сборнике — стихи о труде, любви и свободе, первые стихи</a:t>
+            </a:r>
+          </a:p>
+          <a:p>
+            <a:pPr algn="ctr"/>
+            <a:r>
+              <a:rPr sz="1400" b="0" i="0">
+                <a:solidFill>
+                  <a:srgbClr val="8A8578"/>
+                </a:solidFill>
+                <a:latin typeface="Calibri"/>
+              </a:rPr>
+              <a:t>для детей на осетинском; «Завещание» переведено на 108 языков</a:t>
             </a:r>
           </a:p>
         </p:txBody>
@@ -6702,7 +6894,7 @@
         </p:blipFill>
         <p:spPr>
           <a:xfrm>
-            <a:off x="4374323" y="502920"/>
+            <a:off x="4374323" y="320040"/>
             <a:ext cx="3443353" cy="4663440"/>
           </a:xfrm>
           <a:prstGeom prst="rect">
@@ -6724,8 +6916,8 @@
         </p:nvSpPr>
         <p:spPr>
           <a:xfrm>
-            <a:off x="0" y="5897880"/>
-            <a:ext cx="12192000" cy="960120"/>
+            <a:off x="0" y="5440680"/>
+            <a:ext cx="12192000" cy="1417320"/>
           </a:xfrm>
           <a:prstGeom prst="rect">
             <a:avLst/>
@@ -6770,8 +6962,8 @@
         </p:nvSpPr>
         <p:spPr>
           <a:xfrm>
-            <a:off x="548640" y="5943600"/>
-            <a:ext cx="11091672" cy="868680"/>
+            <a:off x="548640" y="5486400"/>
+            <a:ext cx="11091672" cy="1325880"/>
           </a:xfrm>
           <a:prstGeom prst="rect">
             <a:avLst/>
@@ -6798,17 +6990,33 @@
           <a:p>
             <a:pPr algn="ctr">
               <a:spcBef>
-                <a:spcPts val="400"/>
+                <a:spcPts val="300"/>
               </a:spcBef>
             </a:pPr>
             <a:r>
-              <a:rPr sz="1400" b="0" i="0">
+              <a:rPr sz="1300" b="0" i="0">
                 <a:solidFill>
                   <a:srgbClr val="D8CEBE"/>
                 </a:solidFill>
                 <a:latin typeface="Calibri"/>
               </a:rPr>
               <a:t>живопись Коста Хетагурова</a:t>
+            </a:r>
+          </a:p>
+          <a:p>
+            <a:pPr algn="ctr">
+              <a:spcBef>
+                <a:spcPts val="300"/>
+              </a:spcBef>
+            </a:pPr>
+            <a:r>
+              <a:rPr sz="1300" b="0" i="0">
+                <a:solidFill>
+                  <a:srgbClr val="D8CEBE"/>
+                </a:solidFill>
+                <a:latin typeface="Calibri"/>
+              </a:rPr>
+              <a:t>Тяжёлый труд горской женщины — одна из главных тем его кисти.</a:t>
             </a:r>
           </a:p>
         </p:txBody>
@@ -7144,7 +7352,7 @@
         </p:blipFill>
         <p:spPr>
           <a:xfrm>
-            <a:off x="4440994" y="502920"/>
+            <a:off x="4440994" y="320040"/>
             <a:ext cx="3310012" cy="4663440"/>
           </a:xfrm>
           <a:prstGeom prst="rect">
@@ -7166,8 +7374,8 @@
         </p:nvSpPr>
         <p:spPr>
           <a:xfrm>
-            <a:off x="0" y="5897880"/>
-            <a:ext cx="12192000" cy="960120"/>
+            <a:off x="0" y="5440680"/>
+            <a:ext cx="12192000" cy="1417320"/>
           </a:xfrm>
           <a:prstGeom prst="rect">
             <a:avLst/>
@@ -7212,8 +7420,8 @@
         </p:nvSpPr>
         <p:spPr>
           <a:xfrm>
-            <a:off x="548640" y="5943600"/>
-            <a:ext cx="11091672" cy="868680"/>
+            <a:off x="548640" y="5486400"/>
+            <a:ext cx="11091672" cy="1325880"/>
           </a:xfrm>
           <a:prstGeom prst="rect">
             <a:avLst/>
@@ -7240,17 +7448,33 @@
           <a:p>
             <a:pPr algn="ctr">
               <a:spcBef>
-                <a:spcPts val="400"/>
+                <a:spcPts val="300"/>
               </a:spcBef>
             </a:pPr>
             <a:r>
-              <a:rPr sz="1400" b="0" i="0">
+              <a:rPr sz="1300" b="0" i="0">
                 <a:solidFill>
                   <a:srgbClr val="D8CEBE"/>
                 </a:solidFill>
                 <a:latin typeface="Calibri"/>
               </a:rPr>
-              <a:t>той, что любила и была любима</a:t>
+              <a:t>живопись Коста Хетагурова</a:t>
+            </a:r>
+          </a:p>
+          <a:p>
+            <a:pPr algn="ctr">
+              <a:spcBef>
+                <a:spcPts val="300"/>
+              </a:spcBef>
+            </a:pPr>
+            <a:r>
+              <a:rPr sz="1300" b="0" i="0">
+                <a:solidFill>
+                  <a:srgbClr val="D8CEBE"/>
+                </a:solidFill>
+                <a:latin typeface="Calibri"/>
+              </a:rPr>
+              <a:t>Анна — та, кого любил поэт: о семье и детях он мечтал до конца дней.</a:t>
             </a:r>
           </a:p>
         </p:txBody>
@@ -7586,7 +7810,7 @@
         </p:blipFill>
         <p:spPr>
           <a:xfrm>
-            <a:off x="3425805" y="502920"/>
+            <a:off x="3425805" y="320040"/>
             <a:ext cx="5340390" cy="4663440"/>
           </a:xfrm>
           <a:prstGeom prst="rect">
@@ -7608,8 +7832,8 @@
         </p:nvSpPr>
         <p:spPr>
           <a:xfrm>
-            <a:off x="0" y="5897880"/>
-            <a:ext cx="12192000" cy="960120"/>
+            <a:off x="0" y="5440680"/>
+            <a:ext cx="12192000" cy="1417320"/>
           </a:xfrm>
           <a:prstGeom prst="rect">
             <a:avLst/>
@@ -7654,8 +7878,8 @@
         </p:nvSpPr>
         <p:spPr>
           <a:xfrm>
-            <a:off x="548640" y="5943600"/>
-            <a:ext cx="11091672" cy="868680"/>
+            <a:off x="548640" y="5486400"/>
+            <a:ext cx="11091672" cy="1325880"/>
           </a:xfrm>
           <a:prstGeom prst="rect">
             <a:avLst/>
@@ -7682,17 +7906,33 @@
           <a:p>
             <a:pPr algn="ctr">
               <a:spcBef>
-                <a:spcPts val="400"/>
+                <a:spcPts val="300"/>
               </a:spcBef>
             </a:pPr>
             <a:r>
-              <a:rPr sz="1400" b="0" i="0">
+              <a:rPr sz="1300" b="0" i="0">
                 <a:solidFill>
                   <a:srgbClr val="D8CEBE"/>
                 </a:solidFill>
                 <a:latin typeface="Calibri"/>
               </a:rPr>
-              <a:t>Коста за работой</a:t>
+              <a:t>живопись Коста Хетагурова</a:t>
+            </a:r>
+          </a:p>
+          <a:p>
+            <a:pPr algn="ctr">
+              <a:spcBef>
+                <a:spcPts val="300"/>
+              </a:spcBef>
+            </a:pPr>
+            <a:r>
+              <a:rPr sz="1300" b="0" i="0">
+                <a:solidFill>
+                  <a:srgbClr val="D8CEBE"/>
+                </a:solidFill>
+                <a:latin typeface="Calibri"/>
+              </a:rPr>
+              <a:t>Коста — основоположник станковой и фресковой живописи в Осетии.</a:t>
             </a:r>
           </a:p>
         </p:txBody>
@@ -8028,7 +8268,7 @@
         </p:blipFill>
         <p:spPr>
           <a:xfrm>
-            <a:off x="4327779" y="502920"/>
+            <a:off x="4327779" y="320040"/>
             <a:ext cx="3536442" cy="4663440"/>
           </a:xfrm>
           <a:prstGeom prst="rect">
@@ -8119,6 +8359,22 @@
                 <a:latin typeface="Calibri"/>
               </a:rPr>
               <a:t>Образ Коста в графике</a:t>
+            </a:r>
+          </a:p>
+          <a:p>
+            <a:pPr algn="ctr">
+              <a:spcBef>
+                <a:spcPts val="300"/>
+              </a:spcBef>
+            </a:pPr>
+            <a:r>
+              <a:rPr sz="1300" b="0" i="0">
+                <a:solidFill>
+                  <a:srgbClr val="D8CEBE"/>
+                </a:solidFill>
+                <a:latin typeface="Calibri"/>
+              </a:rPr>
+              <a:t>Народ хранит память о поэте: его образ живёт в работах многих художников.</a:t>
             </a:r>
           </a:p>
         </p:txBody>

--- a/Kosta_Hetagurov.pptx
+++ b/Kosta_Hetagurov.pptx
@@ -17,6 +17,8 @@
     <p:sldId id="265" r:id="rId16"/>
     <p:sldId id="266" r:id="rId17"/>
     <p:sldId id="267" r:id="rId18"/>
+    <p:sldId id="268" r:id="rId19"/>
+    <p:sldId id="269" r:id="rId20"/>
   </p:sldIdLst>
   <p:sldSz cx="12192000" cy="6858000" type="screen4x3"/>
   <p:notesSz cx="6858000" cy="9144000"/>
@@ -3724,6 +3726,922 @@
         <p:nvPr/>
       </p:nvGrpSpPr>
       <p:grpSpPr/>
+      <p:sp>
+        <p:nvSpPr>
+          <p:cNvPr id="2" name="Rectangle 1"/>
+          <p:cNvSpPr/>
+          <p:nvPr/>
+        </p:nvSpPr>
+        <p:spPr>
+          <a:xfrm>
+            <a:off x="0" y="0"/>
+            <a:ext cx="12192000" cy="6858000"/>
+          </a:xfrm>
+          <a:prstGeom prst="rect">
+            <a:avLst/>
+          </a:prstGeom>
+          <a:solidFill>
+            <a:srgbClr val="171310"/>
+          </a:solidFill>
+          <a:ln>
+            <a:noFill/>
+          </a:ln>
+          <a:effectLst/>
+        </p:spPr>
+        <p:style>
+          <a:lnRef idx="1">
+            <a:schemeClr val="accent1"/>
+          </a:lnRef>
+          <a:fillRef idx="3">
+            <a:schemeClr val="accent1"/>
+          </a:fillRef>
+          <a:effectRef idx="2">
+            <a:schemeClr val="accent1"/>
+          </a:effectRef>
+          <a:fontRef idx="minor">
+            <a:schemeClr val="lt1"/>
+          </a:fontRef>
+        </p:style>
+        <p:txBody>
+          <a:bodyPr rtlCol="0" anchor="ctr"/>
+          <a:lstStyle/>
+          <a:p>
+            <a:pPr algn="ctr"/>
+          </a:p>
+        </p:txBody>
+      </p:sp>
+      <p:pic>
+        <p:nvPicPr>
+          <p:cNvPr id="3" name="Picture 2" descr="paint_angel.jpg"/>
+          <p:cNvPicPr>
+            <a:picLocks noChangeAspect="1"/>
+          </p:cNvPicPr>
+          <p:nvPr/>
+        </p:nvPicPr>
+        <p:blipFill>
+          <a:blip r:embed="rId2"/>
+          <a:stretch>
+            <a:fillRect/>
+          </a:stretch>
+        </p:blipFill>
+        <p:spPr>
+          <a:xfrm>
+            <a:off x="4656163" y="388620"/>
+            <a:ext cx="2879674" cy="4663440"/>
+          </a:xfrm>
+          <a:prstGeom prst="rect">
+            <a:avLst/>
+          </a:prstGeom>
+          <a:ln w="38100">
+            <a:solidFill>
+              <a:srgbClr val="C9A227"/>
+            </a:solidFill>
+          </a:ln>
+          <a:effectLst/>
+        </p:spPr>
+      </p:pic>
+      <p:sp>
+        <p:nvSpPr>
+          <p:cNvPr id="4" name="Rectangle 3"/>
+          <p:cNvSpPr/>
+          <p:nvPr/>
+        </p:nvSpPr>
+        <p:spPr>
+          <a:xfrm>
+            <a:off x="0" y="5440680"/>
+            <a:ext cx="12192000" cy="1417320"/>
+          </a:xfrm>
+          <a:prstGeom prst="rect">
+            <a:avLst/>
+          </a:prstGeom>
+          <a:solidFill>
+            <a:srgbClr val="050814">
+              <a:alpha val="62000"/>
+            </a:srgbClr>
+          </a:solidFill>
+          <a:ln>
+            <a:noFill/>
+          </a:ln>
+          <a:effectLst/>
+        </p:spPr>
+        <p:style>
+          <a:lnRef idx="1">
+            <a:schemeClr val="accent1"/>
+          </a:lnRef>
+          <a:fillRef idx="3">
+            <a:schemeClr val="accent1"/>
+          </a:fillRef>
+          <a:effectRef idx="2">
+            <a:schemeClr val="accent1"/>
+          </a:effectRef>
+          <a:fontRef idx="minor">
+            <a:schemeClr val="lt1"/>
+          </a:fontRef>
+        </p:style>
+        <p:txBody>
+          <a:bodyPr rtlCol="0" anchor="ctr"/>
+          <a:lstStyle/>
+          <a:p>
+            <a:pPr algn="ctr"/>
+          </a:p>
+        </p:txBody>
+      </p:sp>
+      <p:sp>
+        <p:nvSpPr>
+          <p:cNvPr id="5" name="TextBox 4"/>
+          <p:cNvSpPr txBox="1"/>
+          <p:nvPr/>
+        </p:nvSpPr>
+        <p:spPr>
+          <a:xfrm>
+            <a:off x="548640" y="5486400"/>
+            <a:ext cx="11091672" cy="1325880"/>
+          </a:xfrm>
+          <a:prstGeom prst="rect">
+            <a:avLst/>
+          </a:prstGeom>
+          <a:noFill/>
+        </p:spPr>
+        <p:txBody>
+          <a:bodyPr wrap="square" anchor="ctr">
+            <a:spAutoFit/>
+          </a:bodyPr>
+          <a:lstStyle/>
+          <a:p>
+            <a:pPr algn="ctr"/>
+            <a:r>
+              <a:rPr sz="2000" b="1" i="0">
+                <a:solidFill>
+                  <a:srgbClr val="FFFFFF"/>
+                </a:solidFill>
+                <a:latin typeface="Calibri"/>
+              </a:rPr>
+              <a:t>«Скорбящий ангел»</a:t>
+            </a:r>
+          </a:p>
+          <a:p>
+            <a:pPr algn="ctr">
+              <a:spcBef>
+                <a:spcPts val="300"/>
+              </a:spcBef>
+            </a:pPr>
+            <a:r>
+              <a:rPr sz="1300" b="0" i="0">
+                <a:solidFill>
+                  <a:srgbClr val="D8CEBE"/>
+                </a:solidFill>
+                <a:latin typeface="Calibri"/>
+              </a:rPr>
+              <a:t>холст, масло — церковная живопись Коста</a:t>
+            </a:r>
+          </a:p>
+          <a:p>
+            <a:pPr algn="ctr">
+              <a:spcBef>
+                <a:spcPts val="300"/>
+              </a:spcBef>
+            </a:pPr>
+            <a:r>
+              <a:rPr sz="1300" b="0" i="0">
+                <a:solidFill>
+                  <a:srgbClr val="D8CEBE"/>
+                </a:solidFill>
+                <a:latin typeface="Calibri"/>
+              </a:rPr>
+              <a:t>Он расписывал храмы и положил начало фресковой живописи Осетии.</a:t>
+            </a:r>
+          </a:p>
+        </p:txBody>
+      </p:sp>
+      <p:sp>
+        <p:nvSpPr>
+          <p:cNvPr id="6" name="TextBox 5"/>
+          <p:cNvSpPr txBox="1"/>
+          <p:nvPr/>
+        </p:nvSpPr>
+        <p:spPr>
+          <a:xfrm>
+            <a:off x="11094720" y="6400800"/>
+            <a:ext cx="914400" cy="320040"/>
+          </a:xfrm>
+          <a:prstGeom prst="rect">
+            <a:avLst/>
+          </a:prstGeom>
+          <a:noFill/>
+        </p:spPr>
+        <p:txBody>
+          <a:bodyPr wrap="square" anchor="t">
+            <a:spAutoFit/>
+          </a:bodyPr>
+          <a:lstStyle/>
+          <a:p>
+            <a:pPr algn="r"/>
+            <a:r>
+              <a:rPr sz="1100" b="0" i="0">
+                <a:solidFill>
+                  <a:srgbClr val="CFD8E3"/>
+                </a:solidFill>
+                <a:latin typeface="Calibri"/>
+              </a:rPr>
+              <a:t>10 / 14</a:t>
+            </a:r>
+          </a:p>
+        </p:txBody>
+      </p:sp>
+    </p:spTree>
+  </p:cSld>
+  <p:clrMapOvr>
+    <a:masterClrMapping/>
+  </p:clrMapOvr>
+  <p:transition spd="med">
+    <p:cover dir="r"/>
+  </p:transition>
+  <p:timing>
+    <p:tnLst>
+      <p:par>
+        <p:cTn id="1" dur="indefinite" restart="never" nodeType="tmRoot">
+          <p:childTnLst>
+            <p:seq concurrent="1" nextAc="seek">
+              <p:cTn id="2" dur="indefinite" nodeType="mainSeq">
+                <p:childTnLst>
+                  <p:par>
+                    <p:cTn id="19" fill="hold">
+                      <p:stCondLst>
+                        <p:cond delay="0"/>
+                      </p:stCondLst>
+                      <p:childTnLst>
+                        <p:par>
+                          <p:cTn id="6" fill="hold">
+                            <p:stCondLst>
+                              <p:cond delay="0"/>
+                            </p:stCondLst>
+                            <p:childTnLst>
+                              <p:par>
+                                <p:cTn id="5" dur="300" fill="hold" nodeType="withEffect" grpId="0" presetID="9" presetClass="entr" presetSubtype="0">
+                                  <p:stCondLst>
+                                    <p:cond delay="0"/>
+                                  </p:stCondLst>
+                                  <p:childTnLst>
+                                    <p:set>
+                                      <p:cBhvr>
+                                        <p:cTn id="3" dur="1" fill="hold">
+                                          <p:stCondLst>
+                                            <p:cond delay="0"/>
+                                          </p:stCondLst>
+                                        </p:cTn>
+                                        <p:tgtEl>
+                                          <p:spTgt spid="2"/>
+                                        </p:tgtEl>
+                                        <p:attrNameLst>
+                                          <p:attrName>style.visibility</p:attrName>
+                                        </p:attrNameLst>
+                                      </p:cBhvr>
+                                      <p:to>
+                                        <p:strVal val="visible"/>
+                                      </p:to>
+                                    </p:set>
+                                    <p:animEffect transition="in" filter="fade">
+                                      <p:cBhvr>
+                                        <p:cTn id="4" dur="300"/>
+                                        <p:tgtEl>
+                                          <p:spTgt spid="2"/>
+                                        </p:tgtEl>
+                                      </p:cBhvr>
+                                    </p:animEffect>
+                                  </p:childTnLst>
+                                </p:cTn>
+                              </p:par>
+                            </p:childTnLst>
+                          </p:cTn>
+                        </p:par>
+                        <p:par>
+                          <p:cTn id="10" fill="hold">
+                            <p:stCondLst>
+                              <p:cond delay="150"/>
+                            </p:stCondLst>
+                            <p:childTnLst>
+                              <p:par>
+                                <p:cTn id="9" dur="1000" fill="hold" nodeType="afterEffect" grpId="0" presetID="22" presetClass="entr" presetSubtype="2">
+                                  <p:stCondLst>
+                                    <p:cond delay="0"/>
+                                  </p:stCondLst>
+                                  <p:childTnLst>
+                                    <p:set>
+                                      <p:cBhvr>
+                                        <p:cTn id="7" dur="1" fill="hold">
+                                          <p:stCondLst>
+                                            <p:cond delay="0"/>
+                                          </p:stCondLst>
+                                        </p:cTn>
+                                        <p:tgtEl>
+                                          <p:spTgt spid="3"/>
+                                        </p:tgtEl>
+                                        <p:attrNameLst>
+                                          <p:attrName>style.visibility</p:attrName>
+                                        </p:attrNameLst>
+                                      </p:cBhvr>
+                                      <p:to>
+                                        <p:strVal val="visible"/>
+                                      </p:to>
+                                    </p:set>
+                                    <p:animEffect transition="in" filter="wipe(right)">
+                                      <p:cBhvr>
+                                        <p:cTn id="8" dur="1000"/>
+                                        <p:tgtEl>
+                                          <p:spTgt spid="3"/>
+                                        </p:tgtEl>
+                                      </p:cBhvr>
+                                    </p:animEffect>
+                                  </p:childTnLst>
+                                </p:cTn>
+                              </p:par>
+                            </p:childTnLst>
+                          </p:cTn>
+                        </p:par>
+                        <p:par>
+                          <p:cTn id="14" fill="hold">
+                            <p:stCondLst>
+                              <p:cond delay="800"/>
+                            </p:stCondLst>
+                            <p:childTnLst>
+                              <p:par>
+                                <p:cTn id="13" dur="500" fill="hold" nodeType="afterEffect" grpId="0" presetID="9" presetClass="entr" presetSubtype="0">
+                                  <p:stCondLst>
+                                    <p:cond delay="0"/>
+                                  </p:stCondLst>
+                                  <p:childTnLst>
+                                    <p:set>
+                                      <p:cBhvr>
+                                        <p:cTn id="11" dur="1" fill="hold">
+                                          <p:stCondLst>
+                                            <p:cond delay="0"/>
+                                          </p:stCondLst>
+                                        </p:cTn>
+                                        <p:tgtEl>
+                                          <p:spTgt spid="4"/>
+                                        </p:tgtEl>
+                                        <p:attrNameLst>
+                                          <p:attrName>style.visibility</p:attrName>
+                                        </p:attrNameLst>
+                                      </p:cBhvr>
+                                      <p:to>
+                                        <p:strVal val="visible"/>
+                                      </p:to>
+                                    </p:set>
+                                    <p:animEffect transition="in" filter="fade">
+                                      <p:cBhvr>
+                                        <p:cTn id="12" dur="500"/>
+                                        <p:tgtEl>
+                                          <p:spTgt spid="4"/>
+                                        </p:tgtEl>
+                                      </p:cBhvr>
+                                    </p:animEffect>
+                                  </p:childTnLst>
+                                </p:cTn>
+                              </p:par>
+                            </p:childTnLst>
+                          </p:cTn>
+                        </p:par>
+                        <p:par>
+                          <p:cTn id="18" fill="hold">
+                            <p:stCondLst>
+                              <p:cond delay="1000"/>
+                            </p:stCondLst>
+                            <p:childTnLst>
+                              <p:par>
+                                <p:cTn id="17" dur="700" fill="hold" nodeType="afterEffect" grpId="0" presetID="9" presetClass="entr" presetSubtype="0">
+                                  <p:stCondLst>
+                                    <p:cond delay="0"/>
+                                  </p:stCondLst>
+                                  <p:childTnLst>
+                                    <p:set>
+                                      <p:cBhvr>
+                                        <p:cTn id="15" dur="1" fill="hold">
+                                          <p:stCondLst>
+                                            <p:cond delay="0"/>
+                                          </p:stCondLst>
+                                        </p:cTn>
+                                        <p:tgtEl>
+                                          <p:spTgt spid="5"/>
+                                        </p:tgtEl>
+                                        <p:attrNameLst>
+                                          <p:attrName>style.visibility</p:attrName>
+                                        </p:attrNameLst>
+                                      </p:cBhvr>
+                                      <p:to>
+                                        <p:strVal val="visible"/>
+                                      </p:to>
+                                    </p:set>
+                                    <p:animEffect transition="in" filter="fade">
+                                      <p:cBhvr>
+                                        <p:cTn id="16" dur="700"/>
+                                        <p:tgtEl>
+                                          <p:spTgt spid="5"/>
+                                        </p:tgtEl>
+                                      </p:cBhvr>
+                                    </p:animEffect>
+                                  </p:childTnLst>
+                                </p:cTn>
+                              </p:par>
+                            </p:childTnLst>
+                          </p:cTn>
+                        </p:par>
+                      </p:childTnLst>
+                    </p:cTn>
+                  </p:par>
+                </p:childTnLst>
+              </p:cTn>
+              <p:prevCondLst>
+                <p:cond evt="onPrev" delay="0">
+                  <p:tgtEl>
+                    <p:sldTgt/>
+                  </p:tgtEl>
+                </p:cond>
+              </p:prevCondLst>
+              <p:nextCondLst>
+                <p:cond evt="onNext" delay="0">
+                  <p:tgtEl>
+                    <p:sldTgt/>
+                  </p:tgtEl>
+                </p:cond>
+              </p:nextCondLst>
+            </p:seq>
+          </p:childTnLst>
+        </p:cTn>
+      </p:par>
+    </p:tnLst>
+  </p:timing>
+</p:sld>
+</file>
+
+<file path=ppt/slides/slide11.xml><?xml version="1.0" encoding="utf-8"?>
+<p:sld xmlns:a="http://schemas.openxmlformats.org/drawingml/2006/main" xmlns:p="http://schemas.openxmlformats.org/presentationml/2006/main" xmlns:r="http://schemas.openxmlformats.org/officeDocument/2006/relationships">
+  <p:cSld>
+    <p:spTree>
+      <p:nvGrpSpPr>
+        <p:cNvPr id="1" name=""/>
+        <p:cNvGrpSpPr/>
+        <p:nvPr/>
+      </p:nvGrpSpPr>
+      <p:grpSpPr/>
+      <p:sp>
+        <p:nvSpPr>
+          <p:cNvPr id="2" name="Rectangle 1"/>
+          <p:cNvSpPr/>
+          <p:nvPr/>
+        </p:nvSpPr>
+        <p:spPr>
+          <a:xfrm>
+            <a:off x="0" y="0"/>
+            <a:ext cx="12192000" cy="6858000"/>
+          </a:xfrm>
+          <a:prstGeom prst="rect">
+            <a:avLst/>
+          </a:prstGeom>
+          <a:solidFill>
+            <a:srgbClr val="171310"/>
+          </a:solidFill>
+          <a:ln>
+            <a:noFill/>
+          </a:ln>
+          <a:effectLst/>
+        </p:spPr>
+        <p:style>
+          <a:lnRef idx="1">
+            <a:schemeClr val="accent1"/>
+          </a:lnRef>
+          <a:fillRef idx="3">
+            <a:schemeClr val="accent1"/>
+          </a:fillRef>
+          <a:effectRef idx="2">
+            <a:schemeClr val="accent1"/>
+          </a:effectRef>
+          <a:fontRef idx="minor">
+            <a:schemeClr val="lt1"/>
+          </a:fontRef>
+        </p:style>
+        <p:txBody>
+          <a:bodyPr rtlCol="0" anchor="ctr"/>
+          <a:lstStyle/>
+          <a:p>
+            <a:pPr algn="ctr"/>
+          </a:p>
+        </p:txBody>
+      </p:sp>
+      <p:pic>
+        <p:nvPicPr>
+          <p:cNvPr id="3" name="Picture 2" descr="paint_self.jpg"/>
+          <p:cNvPicPr>
+            <a:picLocks noChangeAspect="1"/>
+          </p:cNvPicPr>
+          <p:nvPr/>
+        </p:nvPicPr>
+        <p:blipFill>
+          <a:blip r:embed="rId2"/>
+          <a:stretch>
+            <a:fillRect/>
+          </a:stretch>
+        </p:blipFill>
+        <p:spPr>
+          <a:xfrm>
+            <a:off x="3794174" y="388620"/>
+            <a:ext cx="4603652" cy="4663440"/>
+          </a:xfrm>
+          <a:prstGeom prst="rect">
+            <a:avLst/>
+          </a:prstGeom>
+          <a:ln w="38100">
+            <a:solidFill>
+              <a:srgbClr val="C9A227"/>
+            </a:solidFill>
+          </a:ln>
+          <a:effectLst/>
+        </p:spPr>
+      </p:pic>
+      <p:sp>
+        <p:nvSpPr>
+          <p:cNvPr id="4" name="Rectangle 3"/>
+          <p:cNvSpPr/>
+          <p:nvPr/>
+        </p:nvSpPr>
+        <p:spPr>
+          <a:xfrm>
+            <a:off x="0" y="5440680"/>
+            <a:ext cx="12192000" cy="1417320"/>
+          </a:xfrm>
+          <a:prstGeom prst="rect">
+            <a:avLst/>
+          </a:prstGeom>
+          <a:solidFill>
+            <a:srgbClr val="050814">
+              <a:alpha val="62000"/>
+            </a:srgbClr>
+          </a:solidFill>
+          <a:ln>
+            <a:noFill/>
+          </a:ln>
+          <a:effectLst/>
+        </p:spPr>
+        <p:style>
+          <a:lnRef idx="1">
+            <a:schemeClr val="accent1"/>
+          </a:lnRef>
+          <a:fillRef idx="3">
+            <a:schemeClr val="accent1"/>
+          </a:fillRef>
+          <a:effectRef idx="2">
+            <a:schemeClr val="accent1"/>
+          </a:effectRef>
+          <a:fontRef idx="minor">
+            <a:schemeClr val="lt1"/>
+          </a:fontRef>
+        </p:style>
+        <p:txBody>
+          <a:bodyPr rtlCol="0" anchor="ctr"/>
+          <a:lstStyle/>
+          <a:p>
+            <a:pPr algn="ctr"/>
+          </a:p>
+        </p:txBody>
+      </p:sp>
+      <p:sp>
+        <p:nvSpPr>
+          <p:cNvPr id="5" name="TextBox 4"/>
+          <p:cNvSpPr txBox="1"/>
+          <p:nvPr/>
+        </p:nvSpPr>
+        <p:spPr>
+          <a:xfrm>
+            <a:off x="548640" y="5486400"/>
+            <a:ext cx="11091672" cy="1325880"/>
+          </a:xfrm>
+          <a:prstGeom prst="rect">
+            <a:avLst/>
+          </a:prstGeom>
+          <a:noFill/>
+        </p:spPr>
+        <p:txBody>
+          <a:bodyPr wrap="square" anchor="ctr">
+            <a:spAutoFit/>
+          </a:bodyPr>
+          <a:lstStyle/>
+          <a:p>
+            <a:pPr algn="ctr"/>
+            <a:r>
+              <a:rPr sz="2000" b="1" i="0">
+                <a:solidFill>
+                  <a:srgbClr val="FFFFFF"/>
+                </a:solidFill>
+                <a:latin typeface="Calibri"/>
+              </a:rPr>
+              <a:t>Автопортрет</a:t>
+            </a:r>
+          </a:p>
+          <a:p>
+            <a:pPr algn="ctr">
+              <a:spcBef>
+                <a:spcPts val="300"/>
+              </a:spcBef>
+            </a:pPr>
+            <a:r>
+              <a:rPr sz="1300" b="0" i="0">
+                <a:solidFill>
+                  <a:srgbClr val="D8CEBE"/>
+                </a:solidFill>
+                <a:latin typeface="Calibri"/>
+              </a:rPr>
+              <a:t>холст, масло — Северо-Осетинский художественный музей</a:t>
+            </a:r>
+          </a:p>
+          <a:p>
+            <a:pPr algn="ctr">
+              <a:spcBef>
+                <a:spcPts val="300"/>
+              </a:spcBef>
+            </a:pPr>
+            <a:r>
+              <a:rPr sz="1300" b="0" i="0">
+                <a:solidFill>
+                  <a:srgbClr val="D8CEBE"/>
+                </a:solidFill>
+                <a:latin typeface="Calibri"/>
+              </a:rPr>
+              <a:t>Художник смотрит на нас через столетие.</a:t>
+            </a:r>
+          </a:p>
+        </p:txBody>
+      </p:sp>
+      <p:sp>
+        <p:nvSpPr>
+          <p:cNvPr id="6" name="TextBox 5"/>
+          <p:cNvSpPr txBox="1"/>
+          <p:nvPr/>
+        </p:nvSpPr>
+        <p:spPr>
+          <a:xfrm>
+            <a:off x="11094720" y="6400800"/>
+            <a:ext cx="914400" cy="320040"/>
+          </a:xfrm>
+          <a:prstGeom prst="rect">
+            <a:avLst/>
+          </a:prstGeom>
+          <a:noFill/>
+        </p:spPr>
+        <p:txBody>
+          <a:bodyPr wrap="square" anchor="t">
+            <a:spAutoFit/>
+          </a:bodyPr>
+          <a:lstStyle/>
+          <a:p>
+            <a:pPr algn="r"/>
+            <a:r>
+              <a:rPr sz="1100" b="0" i="0">
+                <a:solidFill>
+                  <a:srgbClr val="CFD8E3"/>
+                </a:solidFill>
+                <a:latin typeface="Calibri"/>
+              </a:rPr>
+              <a:t>11 / 14</a:t>
+            </a:r>
+          </a:p>
+        </p:txBody>
+      </p:sp>
+    </p:spTree>
+  </p:cSld>
+  <p:clrMapOvr>
+    <a:masterClrMapping/>
+  </p:clrMapOvr>
+  <p:transition spd="med">
+    <p:comb dir="horz"/>
+  </p:transition>
+  <p:timing>
+    <p:tnLst>
+      <p:par>
+        <p:cTn id="1" dur="indefinite" restart="never" nodeType="tmRoot">
+          <p:childTnLst>
+            <p:seq concurrent="1" nextAc="seek">
+              <p:cTn id="2" dur="indefinite" nodeType="mainSeq">
+                <p:childTnLst>
+                  <p:par>
+                    <p:cTn id="19" fill="hold">
+                      <p:stCondLst>
+                        <p:cond delay="0"/>
+                      </p:stCondLst>
+                      <p:childTnLst>
+                        <p:par>
+                          <p:cTn id="6" fill="hold">
+                            <p:stCondLst>
+                              <p:cond delay="0"/>
+                            </p:stCondLst>
+                            <p:childTnLst>
+                              <p:par>
+                                <p:cTn id="5" dur="300" fill="hold" nodeType="withEffect" grpId="0" presetID="9" presetClass="entr" presetSubtype="0">
+                                  <p:stCondLst>
+                                    <p:cond delay="0"/>
+                                  </p:stCondLst>
+                                  <p:childTnLst>
+                                    <p:set>
+                                      <p:cBhvr>
+                                        <p:cTn id="3" dur="1" fill="hold">
+                                          <p:stCondLst>
+                                            <p:cond delay="0"/>
+                                          </p:stCondLst>
+                                        </p:cTn>
+                                        <p:tgtEl>
+                                          <p:spTgt spid="2"/>
+                                        </p:tgtEl>
+                                        <p:attrNameLst>
+                                          <p:attrName>style.visibility</p:attrName>
+                                        </p:attrNameLst>
+                                      </p:cBhvr>
+                                      <p:to>
+                                        <p:strVal val="visible"/>
+                                      </p:to>
+                                    </p:set>
+                                    <p:animEffect transition="in" filter="fade">
+                                      <p:cBhvr>
+                                        <p:cTn id="4" dur="300"/>
+                                        <p:tgtEl>
+                                          <p:spTgt spid="2"/>
+                                        </p:tgtEl>
+                                      </p:cBhvr>
+                                    </p:animEffect>
+                                  </p:childTnLst>
+                                </p:cTn>
+                              </p:par>
+                            </p:childTnLst>
+                          </p:cTn>
+                        </p:par>
+                        <p:par>
+                          <p:cTn id="10" fill="hold">
+                            <p:stCondLst>
+                              <p:cond delay="150"/>
+                            </p:stCondLst>
+                            <p:childTnLst>
+                              <p:par>
+                                <p:cTn id="9" dur="1000" fill="hold" nodeType="afterEffect" grpId="0" presetID="22" presetClass="entr" presetSubtype="2">
+                                  <p:stCondLst>
+                                    <p:cond delay="0"/>
+                                  </p:stCondLst>
+                                  <p:childTnLst>
+                                    <p:set>
+                                      <p:cBhvr>
+                                        <p:cTn id="7" dur="1" fill="hold">
+                                          <p:stCondLst>
+                                            <p:cond delay="0"/>
+                                          </p:stCondLst>
+                                        </p:cTn>
+                                        <p:tgtEl>
+                                          <p:spTgt spid="3"/>
+                                        </p:tgtEl>
+                                        <p:attrNameLst>
+                                          <p:attrName>style.visibility</p:attrName>
+                                        </p:attrNameLst>
+                                      </p:cBhvr>
+                                      <p:to>
+                                        <p:strVal val="visible"/>
+                                      </p:to>
+                                    </p:set>
+                                    <p:animEffect transition="in" filter="wipe(right)">
+                                      <p:cBhvr>
+                                        <p:cTn id="8" dur="1000"/>
+                                        <p:tgtEl>
+                                          <p:spTgt spid="3"/>
+                                        </p:tgtEl>
+                                      </p:cBhvr>
+                                    </p:animEffect>
+                                  </p:childTnLst>
+                                </p:cTn>
+                              </p:par>
+                            </p:childTnLst>
+                          </p:cTn>
+                        </p:par>
+                        <p:par>
+                          <p:cTn id="14" fill="hold">
+                            <p:stCondLst>
+                              <p:cond delay="800"/>
+                            </p:stCondLst>
+                            <p:childTnLst>
+                              <p:par>
+                                <p:cTn id="13" dur="500" fill="hold" nodeType="afterEffect" grpId="0" presetID="9" presetClass="entr" presetSubtype="0">
+                                  <p:stCondLst>
+                                    <p:cond delay="0"/>
+                                  </p:stCondLst>
+                                  <p:childTnLst>
+                                    <p:set>
+                                      <p:cBhvr>
+                                        <p:cTn id="11" dur="1" fill="hold">
+                                          <p:stCondLst>
+                                            <p:cond delay="0"/>
+                                          </p:stCondLst>
+                                        </p:cTn>
+                                        <p:tgtEl>
+                                          <p:spTgt spid="4"/>
+                                        </p:tgtEl>
+                                        <p:attrNameLst>
+                                          <p:attrName>style.visibility</p:attrName>
+                                        </p:attrNameLst>
+                                      </p:cBhvr>
+                                      <p:to>
+                                        <p:strVal val="visible"/>
+                                      </p:to>
+                                    </p:set>
+                                    <p:animEffect transition="in" filter="fade">
+                                      <p:cBhvr>
+                                        <p:cTn id="12" dur="500"/>
+                                        <p:tgtEl>
+                                          <p:spTgt spid="4"/>
+                                        </p:tgtEl>
+                                      </p:cBhvr>
+                                    </p:animEffect>
+                                  </p:childTnLst>
+                                </p:cTn>
+                              </p:par>
+                            </p:childTnLst>
+                          </p:cTn>
+                        </p:par>
+                        <p:par>
+                          <p:cTn id="18" fill="hold">
+                            <p:stCondLst>
+                              <p:cond delay="1000"/>
+                            </p:stCondLst>
+                            <p:childTnLst>
+                              <p:par>
+                                <p:cTn id="17" dur="700" fill="hold" nodeType="afterEffect" grpId="0" presetID="9" presetClass="entr" presetSubtype="0">
+                                  <p:stCondLst>
+                                    <p:cond delay="0"/>
+                                  </p:stCondLst>
+                                  <p:childTnLst>
+                                    <p:set>
+                                      <p:cBhvr>
+                                        <p:cTn id="15" dur="1" fill="hold">
+                                          <p:stCondLst>
+                                            <p:cond delay="0"/>
+                                          </p:stCondLst>
+                                        </p:cTn>
+                                        <p:tgtEl>
+                                          <p:spTgt spid="5"/>
+                                        </p:tgtEl>
+                                        <p:attrNameLst>
+                                          <p:attrName>style.visibility</p:attrName>
+                                        </p:attrNameLst>
+                                      </p:cBhvr>
+                                      <p:to>
+                                        <p:strVal val="visible"/>
+                                      </p:to>
+                                    </p:set>
+                                    <p:animEffect transition="in" filter="fade">
+                                      <p:cBhvr>
+                                        <p:cTn id="16" dur="700"/>
+                                        <p:tgtEl>
+                                          <p:spTgt spid="5"/>
+                                        </p:tgtEl>
+                                      </p:cBhvr>
+                                    </p:animEffect>
+                                  </p:childTnLst>
+                                </p:cTn>
+                              </p:par>
+                            </p:childTnLst>
+                          </p:cTn>
+                        </p:par>
+                      </p:childTnLst>
+                    </p:cTn>
+                  </p:par>
+                </p:childTnLst>
+              </p:cTn>
+              <p:prevCondLst>
+                <p:cond evt="onPrev" delay="0">
+                  <p:tgtEl>
+                    <p:sldTgt/>
+                  </p:tgtEl>
+                </p:cond>
+              </p:prevCondLst>
+              <p:nextCondLst>
+                <p:cond evt="onNext" delay="0">
+                  <p:tgtEl>
+                    <p:sldTgt/>
+                  </p:tgtEl>
+                </p:cond>
+              </p:nextCondLst>
+            </p:seq>
+          </p:childTnLst>
+        </p:cTn>
+      </p:par>
+    </p:tnLst>
+  </p:timing>
+</p:sld>
+</file>
+
+<file path=ppt/slides/slide12.xml><?xml version="1.0" encoding="utf-8"?>
+<p:sld xmlns:a="http://schemas.openxmlformats.org/drawingml/2006/main" xmlns:p="http://schemas.openxmlformats.org/presentationml/2006/main" xmlns:r="http://schemas.openxmlformats.org/officeDocument/2006/relationships">
+  <p:cSld>
+    <p:spTree>
+      <p:nvGrpSpPr>
+        <p:cNvPr id="1" name=""/>
+        <p:cNvGrpSpPr/>
+        <p:nvPr/>
+      </p:nvGrpSpPr>
+      <p:grpSpPr/>
       <p:pic>
         <p:nvPicPr>
           <p:cNvPr id="2" name="Picture 1" descr="monument_bronze.jpg"/>
@@ -4082,7 +5000,7 @@
 </p:sld>
 </file>
 
-<file path=ppt/slides/slide11.xml><?xml version="1.0" encoding="utf-8"?>
+<file path=ppt/slides/slide13.xml><?xml version="1.0" encoding="utf-8"?>
 <p:sld xmlns:a="http://schemas.openxmlformats.org/drawingml/2006/main" xmlns:p="http://schemas.openxmlformats.org/presentationml/2006/main" xmlns:r="http://schemas.openxmlformats.org/officeDocument/2006/relationships">
   <p:cSld>
     <p:spTree>
@@ -4450,7 +5368,7 @@
 </p:sld>
 </file>
 
-<file path=ppt/slides/slide12.xml><?xml version="1.0" encoding="utf-8"?>
+<file path=ppt/slides/slide14.xml><?xml version="1.0" encoding="utf-8"?>
 <p:sld xmlns:a="http://schemas.openxmlformats.org/drawingml/2006/main" xmlns:p="http://schemas.openxmlformats.org/presentationml/2006/main" xmlns:r="http://schemas.openxmlformats.org/officeDocument/2006/relationships">
   <p:cSld>
     <p:spTree>
@@ -5134,7 +6052,7 @@
                 </a:solidFill>
                 <a:latin typeface="Calibri"/>
               </a:rPr>
-              <a:t>02 / 12</a:t>
+              <a:t>02 / 14</a:t>
             </a:r>
           </a:p>
         </p:txBody>
@@ -6023,7 +6941,7 @@
                 </a:solidFill>
                 <a:latin typeface="Calibri"/>
               </a:rPr>
-              <a:t>04 / 12</a:t>
+              <a:t>04 / 14</a:t>
             </a:r>
           </a:p>
         </p:txBody>
@@ -6549,7 +7467,7 @@
                 </a:solidFill>
                 <a:latin typeface="Calibri"/>
               </a:rPr>
-              <a:t>05 / 12</a:t>
+              <a:t>05 / 14</a:t>
             </a:r>
           </a:p>
         </p:txBody>
@@ -6880,7 +7798,7 @@
       </p:sp>
       <p:pic>
         <p:nvPicPr>
-          <p:cNvPr id="3" name="Picture 2" descr="paint_goryanka_crop.jpg"/>
+          <p:cNvPr id="3" name="Picture 2" descr="paint_istochnik.jpg"/>
           <p:cNvPicPr>
             <a:picLocks noChangeAspect="1"/>
           </p:cNvPicPr>
@@ -6894,8 +7812,8 @@
         </p:blipFill>
         <p:spPr>
           <a:xfrm>
-            <a:off x="4374323" y="320040"/>
-            <a:ext cx="3443353" cy="4663440"/>
+            <a:off x="4764922" y="388620"/>
+            <a:ext cx="2662155" cy="4663440"/>
           </a:xfrm>
           <a:prstGeom prst="rect">
             <a:avLst/>
@@ -6984,7 +7902,7 @@
                 </a:solidFill>
                 <a:latin typeface="Calibri"/>
               </a:rPr>
-              <a:t>«Горянка, идущая за водой»</a:t>
+              <a:t>«К источнику»</a:t>
             </a:r>
           </a:p>
           <a:p>
@@ -7000,7 +7918,7 @@
                 </a:solidFill>
                 <a:latin typeface="Calibri"/>
               </a:rPr>
-              <a:t>живопись Коста Хетагурова</a:t>
+              <a:t>холст, масло — Северо-Осетинский художественный музей</a:t>
             </a:r>
           </a:p>
           <a:p>
@@ -7016,7 +7934,7 @@
                 </a:solidFill>
                 <a:latin typeface="Calibri"/>
               </a:rPr>
-              <a:t>Тяжёлый труд горской женщины — одна из главных тем его кисти.</a:t>
+              <a:t>Тяжёлый труд горской женщины — одна из главных тем кисти Коста.</a:t>
             </a:r>
           </a:p>
         </p:txBody>
@@ -7051,7 +7969,7 @@
                 </a:solidFill>
                 <a:latin typeface="Calibri"/>
               </a:rPr>
-              <a:t>06 / 12</a:t>
+              <a:t>06 / 14</a:t>
             </a:r>
           </a:p>
         </p:txBody>
@@ -7338,7 +8256,7 @@
       </p:sp>
       <p:pic>
         <p:nvPicPr>
-          <p:cNvPr id="3" name="Picture 2" descr="paint_popova_crop.jpg"/>
+          <p:cNvPr id="3" name="Picture 2" descr="paint_deti.jpg"/>
           <p:cNvPicPr>
             <a:picLocks noChangeAspect="1"/>
           </p:cNvPicPr>
@@ -7352,8 +8270,8 @@
         </p:blipFill>
         <p:spPr>
           <a:xfrm>
-            <a:off x="4440994" y="320040"/>
-            <a:ext cx="3310012" cy="4663440"/>
+            <a:off x="4424801" y="388620"/>
+            <a:ext cx="3342397" cy="4663440"/>
           </a:xfrm>
           <a:prstGeom prst="rect">
             <a:avLst/>
@@ -7442,7 +8360,7 @@
                 </a:solidFill>
                 <a:latin typeface="Calibri"/>
               </a:rPr>
-              <a:t>Портрет А. Я. Поповой</a:t>
+              <a:t>«Дети-каменщики»</a:t>
             </a:r>
           </a:p>
           <a:p>
@@ -7458,7 +8376,7 @@
                 </a:solidFill>
                 <a:latin typeface="Calibri"/>
               </a:rPr>
-              <a:t>живопись Коста Хетагурова</a:t>
+              <a:t>1886–1891, холст, масло, 194×139 см</a:t>
             </a:r>
           </a:p>
           <a:p>
@@ -7474,7 +8392,7 @@
                 </a:solidFill>
                 <a:latin typeface="Calibri"/>
               </a:rPr>
-              <a:t>Анна — та, кого любил поэт: о семье и детях он мечтал до конца дней.</a:t>
+              <a:t>Незавершённый шедевр о детском труде, написанный до первой ссылки.</a:t>
             </a:r>
           </a:p>
         </p:txBody>
@@ -7509,7 +8427,7 @@
                 </a:solidFill>
                 <a:latin typeface="Calibri"/>
               </a:rPr>
-              <a:t>07 / 12</a:t>
+              <a:t>07 / 14</a:t>
             </a:r>
           </a:p>
         </p:txBody>
@@ -7796,7 +8714,7 @@
       </p:sp>
       <p:pic>
         <p:nvPicPr>
-          <p:cNvPr id="3" name="Picture 2" descr="paint_master_crop.jpg"/>
+          <p:cNvPr id="3" name="Picture 2" descr="paint_stolovaya.jpg"/>
           <p:cNvPicPr>
             <a:picLocks noChangeAspect="1"/>
           </p:cNvPicPr>
@@ -7810,8 +8728,8 @@
         </p:blipFill>
         <p:spPr>
           <a:xfrm>
-            <a:off x="3425805" y="320040"/>
-            <a:ext cx="5340390" cy="4663440"/>
+            <a:off x="2667000" y="615920"/>
+            <a:ext cx="6857999" cy="4208839"/>
           </a:xfrm>
           <a:prstGeom prst="rect">
             <a:avLst/>
@@ -7900,7 +8818,7 @@
                 </a:solidFill>
                 <a:latin typeface="Calibri"/>
               </a:rPr>
-              <a:t>«Мастерская художника»</a:t>
+              <a:t>«Столовая гора»</a:t>
             </a:r>
           </a:p>
           <a:p>
@@ -7916,7 +8834,7 @@
                 </a:solidFill>
                 <a:latin typeface="Calibri"/>
               </a:rPr>
-              <a:t>живопись Коста Хетагурова</a:t>
+              <a:t>пейзаж, холст, масло</a:t>
             </a:r>
           </a:p>
           <a:p>
@@ -7932,7 +8850,7 @@
                 </a:solidFill>
                 <a:latin typeface="Calibri"/>
               </a:rPr>
-              <a:t>Коста — основоположник станковой и фресковой живописи в Осетии.</a:t>
+              <a:t>Горы вокруг Владикавказа — родной пейзаж поэта.</a:t>
             </a:r>
           </a:p>
         </p:txBody>
@@ -7967,7 +8885,7 @@
                 </a:solidFill>
                 <a:latin typeface="Calibri"/>
               </a:rPr>
-              <a:t>08 / 12</a:t>
+              <a:t>08 / 14</a:t>
             </a:r>
           </a:p>
         </p:txBody>
@@ -8254,7 +9172,7 @@
       </p:sp>
       <p:pic>
         <p:nvPicPr>
-          <p:cNvPr id="3" name="Picture 2" descr="draw_4.jpg"/>
+          <p:cNvPr id="3" name="Picture 2" descr="paint_most.jpg"/>
           <p:cNvPicPr>
             <a:picLocks noChangeAspect="1"/>
           </p:cNvPicPr>
@@ -8268,8 +9186,8 @@
         </p:blipFill>
         <p:spPr>
           <a:xfrm>
-            <a:off x="4327779" y="320040"/>
-            <a:ext cx="3536442" cy="4663440"/>
+            <a:off x="4996132" y="388620"/>
+            <a:ext cx="2199735" cy="4663440"/>
           </a:xfrm>
           <a:prstGeom prst="rect">
             <a:avLst/>
@@ -8290,8 +9208,8 @@
         </p:nvSpPr>
         <p:spPr>
           <a:xfrm>
-            <a:off x="0" y="5897880"/>
-            <a:ext cx="12192000" cy="960120"/>
+            <a:off x="0" y="5440680"/>
+            <a:ext cx="12192000" cy="1417320"/>
           </a:xfrm>
           <a:prstGeom prst="rect">
             <a:avLst/>
@@ -8336,8 +9254,8 @@
         </p:nvSpPr>
         <p:spPr>
           <a:xfrm>
-            <a:off x="548640" y="5943600"/>
-            <a:ext cx="11091672" cy="868680"/>
+            <a:off x="548640" y="5486400"/>
+            <a:ext cx="11091672" cy="1325880"/>
           </a:xfrm>
           <a:prstGeom prst="rect">
             <a:avLst/>
@@ -8358,7 +9276,7 @@
                 </a:solidFill>
                 <a:latin typeface="Calibri"/>
               </a:rPr>
-              <a:t>Образ Коста в графике</a:t>
+              <a:t>«Природный мост»</a:t>
             </a:r>
           </a:p>
           <a:p>
@@ -8374,7 +9292,23 @@
                 </a:solidFill>
                 <a:latin typeface="Calibri"/>
               </a:rPr>
-              <a:t>Народ хранит память о поэте: его образ живёт в работах многих художников.</a:t>
+              <a:t>пейзаж, холст, масло — музей им. М. С. Туганова</a:t>
+            </a:r>
+          </a:p>
+          <a:p>
+            <a:pPr algn="ctr">
+              <a:spcBef>
+                <a:spcPts val="300"/>
+              </a:spcBef>
+            </a:pPr>
+            <a:r>
+              <a:rPr sz="1300" b="0" i="0">
+                <a:solidFill>
+                  <a:srgbClr val="D8CEBE"/>
+                </a:solidFill>
+                <a:latin typeface="Calibri"/>
+              </a:rPr>
+              <a:t>Коста исходил ущелья Кавказа и запечатлел его чудеса.</a:t>
             </a:r>
           </a:p>
         </p:txBody>
@@ -8409,7 +9343,7 @@
                 </a:solidFill>
                 <a:latin typeface="Calibri"/>
               </a:rPr>
-              <a:t>09 / 12</a:t>
+              <a:t>09 / 14</a:t>
             </a:r>
           </a:p>
         </p:txBody>

--- a/Kosta_Hetagurov.pptx
+++ b/Kosta_Hetagurov.pptx
@@ -19,6 +19,7 @@
     <p:sldId id="267" r:id="rId18"/>
     <p:sldId id="268" r:id="rId19"/>
     <p:sldId id="269" r:id="rId20"/>
+    <p:sldId id="270" r:id="rId21"/>
   </p:sldIdLst>
   <p:sldSz cx="12192000" cy="6858000" type="screen4x3"/>
   <p:notesSz cx="6858000" cy="9144000"/>
@@ -3772,7 +3773,7 @@
       </p:sp>
       <p:pic>
         <p:nvPicPr>
-          <p:cNvPr id="3" name="Picture 2" descr="paint_angel.jpg"/>
+          <p:cNvPr id="3" name="Picture 2" descr="paint_most.jpg"/>
           <p:cNvPicPr>
             <a:picLocks noChangeAspect="1"/>
           </p:cNvPicPr>
@@ -3786,8 +3787,8 @@
         </p:blipFill>
         <p:spPr>
           <a:xfrm>
-            <a:off x="4656163" y="388620"/>
-            <a:ext cx="2879674" cy="4663440"/>
+            <a:off x="4996132" y="388620"/>
+            <a:ext cx="2199735" cy="4663440"/>
           </a:xfrm>
           <a:prstGeom prst="rect">
             <a:avLst/>
@@ -3876,7 +3877,7 @@
                 </a:solidFill>
                 <a:latin typeface="Calibri"/>
               </a:rPr>
-              <a:t>«Скорбящий ангел»</a:t>
+              <a:t>«Природный мост»</a:t>
             </a:r>
           </a:p>
           <a:p>
@@ -3892,7 +3893,7 @@
                 </a:solidFill>
                 <a:latin typeface="Calibri"/>
               </a:rPr>
-              <a:t>холст, масло — церковная живопись Коста</a:t>
+              <a:t>пейзаж, холст, масло — музей им. М. С. Туганова</a:t>
             </a:r>
           </a:p>
           <a:p>
@@ -3908,7 +3909,7 @@
                 </a:solidFill>
                 <a:latin typeface="Calibri"/>
               </a:rPr>
-              <a:t>Он расписывал храмы и положил начало фресковой живописи Осетии.</a:t>
+              <a:t>Коста исходил ущелья Кавказа и запечатлел его чудеса.</a:t>
             </a:r>
           </a:p>
         </p:txBody>
@@ -3943,7 +3944,7 @@
                 </a:solidFill>
                 <a:latin typeface="Calibri"/>
               </a:rPr>
-              <a:t>10 / 14</a:t>
+              <a:t>10 / 15</a:t>
             </a:r>
           </a:p>
         </p:txBody>
@@ -3954,7 +3955,7 @@
     <a:masterClrMapping/>
   </p:clrMapOvr>
   <p:transition spd="med">
-    <p:cover dir="r"/>
+    <p:wedge/>
   </p:transition>
   <p:timing>
     <p:tnLst>
@@ -4230,7 +4231,7 @@
       </p:sp>
       <p:pic>
         <p:nvPicPr>
-          <p:cNvPr id="3" name="Picture 2" descr="paint_self.jpg"/>
+          <p:cNvPr id="3" name="Picture 2" descr="paint_angel.jpg"/>
           <p:cNvPicPr>
             <a:picLocks noChangeAspect="1"/>
           </p:cNvPicPr>
@@ -4244,8 +4245,8 @@
         </p:blipFill>
         <p:spPr>
           <a:xfrm>
-            <a:off x="3794174" y="388620"/>
-            <a:ext cx="4603652" cy="4663440"/>
+            <a:off x="4656163" y="388620"/>
+            <a:ext cx="2879674" cy="4663440"/>
           </a:xfrm>
           <a:prstGeom prst="rect">
             <a:avLst/>
@@ -4334,7 +4335,7 @@
                 </a:solidFill>
                 <a:latin typeface="Calibri"/>
               </a:rPr>
-              <a:t>Автопортрет</a:t>
+              <a:t>«Скорбящий ангел»</a:t>
             </a:r>
           </a:p>
           <a:p>
@@ -4350,7 +4351,7 @@
                 </a:solidFill>
                 <a:latin typeface="Calibri"/>
               </a:rPr>
-              <a:t>холст, масло — Северо-Осетинский художественный музей</a:t>
+              <a:t>холст, масло — церковная живопись Коста</a:t>
             </a:r>
           </a:p>
           <a:p>
@@ -4366,7 +4367,7 @@
                 </a:solidFill>
                 <a:latin typeface="Calibri"/>
               </a:rPr>
-              <a:t>Художник смотрит на нас через столетие.</a:t>
+              <a:t>Он расписывал храмы и положил начало фресковой живописи Осетии.</a:t>
             </a:r>
           </a:p>
         </p:txBody>
@@ -4401,7 +4402,7 @@
                 </a:solidFill>
                 <a:latin typeface="Calibri"/>
               </a:rPr>
-              <a:t>11 / 14</a:t>
+              <a:t>11 / 15</a:t>
             </a:r>
           </a:p>
         </p:txBody>
@@ -4412,7 +4413,7 @@
     <a:masterClrMapping/>
   </p:clrMapOvr>
   <p:transition spd="med">
-    <p:comb dir="horz"/>
+    <p:cover dir="r"/>
   </p:transition>
   <p:timing>
     <p:tnLst>
@@ -4642,9 +4643,53 @@
         <p:nvPr/>
       </p:nvGrpSpPr>
       <p:grpSpPr/>
+      <p:sp>
+        <p:nvSpPr>
+          <p:cNvPr id="2" name="Rectangle 1"/>
+          <p:cNvSpPr/>
+          <p:nvPr/>
+        </p:nvSpPr>
+        <p:spPr>
+          <a:xfrm>
+            <a:off x="0" y="0"/>
+            <a:ext cx="12192000" cy="6858000"/>
+          </a:xfrm>
+          <a:prstGeom prst="rect">
+            <a:avLst/>
+          </a:prstGeom>
+          <a:solidFill>
+            <a:srgbClr val="171310"/>
+          </a:solidFill>
+          <a:ln>
+            <a:noFill/>
+          </a:ln>
+          <a:effectLst/>
+        </p:spPr>
+        <p:style>
+          <a:lnRef idx="1">
+            <a:schemeClr val="accent1"/>
+          </a:lnRef>
+          <a:fillRef idx="3">
+            <a:schemeClr val="accent1"/>
+          </a:fillRef>
+          <a:effectRef idx="2">
+            <a:schemeClr val="accent1"/>
+          </a:effectRef>
+          <a:fontRef idx="minor">
+            <a:schemeClr val="lt1"/>
+          </a:fontRef>
+        </p:style>
+        <p:txBody>
+          <a:bodyPr rtlCol="0" anchor="ctr"/>
+          <a:lstStyle/>
+          <a:p>
+            <a:pPr algn="ctr"/>
+          </a:p>
+        </p:txBody>
+      </p:sp>
       <p:pic>
         <p:nvPicPr>
-          <p:cNvPr id="2" name="Picture 1" descr="monument_bronze.jpg"/>
+          <p:cNvPr id="3" name="Picture 2" descr="paint_self.jpg"/>
           <p:cNvPicPr>
             <a:picLocks noChangeAspect="1"/>
           </p:cNvPicPr>
@@ -4658,18 +4703,23 @@
         </p:blipFill>
         <p:spPr>
           <a:xfrm>
-            <a:off x="0" y="0"/>
-            <a:ext cx="12192000" cy="6858000"/>
+            <a:off x="3794174" y="388620"/>
+            <a:ext cx="4603652" cy="4663440"/>
           </a:xfrm>
           <a:prstGeom prst="rect">
             <a:avLst/>
           </a:prstGeom>
+          <a:ln w="38100">
+            <a:solidFill>
+              <a:srgbClr val="C9A227"/>
+            </a:solidFill>
+          </a:ln>
           <a:effectLst/>
         </p:spPr>
       </p:pic>
       <p:sp>
         <p:nvSpPr>
-          <p:cNvPr id="3" name="Rectangle 2"/>
+          <p:cNvPr id="4" name="Rectangle 3"/>
           <p:cNvSpPr/>
           <p:nvPr/>
         </p:nvSpPr>
@@ -4715,7 +4765,7 @@
       </p:sp>
       <p:sp>
         <p:nvSpPr>
-          <p:cNvPr id="4" name="TextBox 3"/>
+          <p:cNvPr id="5" name="TextBox 4"/>
           <p:cNvSpPr txBox="1"/>
           <p:nvPr/>
         </p:nvSpPr>
@@ -4743,7 +4793,7 @@
                 </a:solidFill>
                 <a:latin typeface="Calibri"/>
               </a:rPr>
-              <a:t>Владикавказ — памятник Коста</a:t>
+              <a:t>Автопортрет</a:t>
             </a:r>
           </a:p>
           <a:p>
@@ -4759,7 +4809,7 @@
                 </a:solidFill>
                 <a:latin typeface="Calibri"/>
               </a:rPr>
-              <a:t>Прах поэта народ перенёс сюда и схоронил на Осетинской горке.</a:t>
+              <a:t>холст, масло — Северо-Осетинский художественный музей</a:t>
             </a:r>
           </a:p>
           <a:p>
@@ -4775,7 +4825,42 @@
                 </a:solidFill>
                 <a:latin typeface="Calibri"/>
               </a:rPr>
-              <a:t>Именем Коста названы центральный парк, улицы и театр.</a:t>
+              <a:t>Художник смотрит на нас через столетие.</a:t>
+            </a:r>
+          </a:p>
+        </p:txBody>
+      </p:sp>
+      <p:sp>
+        <p:nvSpPr>
+          <p:cNvPr id="6" name="TextBox 5"/>
+          <p:cNvSpPr txBox="1"/>
+          <p:nvPr/>
+        </p:nvSpPr>
+        <p:spPr>
+          <a:xfrm>
+            <a:off x="11094720" y="6400800"/>
+            <a:ext cx="914400" cy="320040"/>
+          </a:xfrm>
+          <a:prstGeom prst="rect">
+            <a:avLst/>
+          </a:prstGeom>
+          <a:noFill/>
+        </p:spPr>
+        <p:txBody>
+          <a:bodyPr wrap="square" anchor="t">
+            <a:spAutoFit/>
+          </a:bodyPr>
+          <a:lstStyle/>
+          <a:p>
+            <a:pPr algn="r"/>
+            <a:r>
+              <a:rPr sz="1100" b="0" i="0">
+                <a:solidFill>
+                  <a:srgbClr val="CFD8E3"/>
+                </a:solidFill>
+                <a:latin typeface="Calibri"/>
+              </a:rPr>
+              <a:t>12 / 15</a:t>
             </a:r>
           </a:p>
         </p:txBody>
@@ -4786,7 +4871,7 @@
     <a:masterClrMapping/>
   </p:clrMapOvr>
   <p:transition spd="med">
-    <p:push dir="r"/>
+    <p:comb dir="horz"/>
   </p:transition>
   <p:timing>
     <p:tnLst>
@@ -4797,7 +4882,7 @@
               <p:cTn id="2" dur="indefinite" nodeType="mainSeq">
                 <p:childTnLst>
                   <p:par>
-                    <p:cTn id="16" fill="hold">
+                    <p:cTn id="19" fill="hold">
                       <p:stCondLst>
                         <p:cond delay="0"/>
                       </p:stCondLst>
@@ -4809,7 +4894,7 @@
                             </p:stCondLst>
                             <p:childTnLst>
                               <p:par>
-                                <p:cTn id="5" dur="400" fill="hold" nodeType="withEffect" grpId="0" presetID="9" presetClass="entr" presetSubtype="0">
+                                <p:cTn id="5" dur="300" fill="hold" nodeType="withEffect" grpId="0" presetID="9" presetClass="entr" presetSubtype="0">
                                   <p:stCondLst>
                                     <p:cond delay="0"/>
                                   </p:stCondLst>
@@ -4834,7 +4919,7 @@
                                     </p:set>
                                     <p:animEffect transition="in" filter="fade">
                                       <p:cBhvr>
-                                        <p:cTn id="4" dur="400"/>
+                                        <p:cTn id="4" dur="300"/>
                                         <p:tgtEl>
                                           <p:spTgt spid="2"/>
                                         </p:tgtEl>
@@ -4849,11 +4934,11 @@
                         <p:par>
                           <p:cTn id="10" fill="hold">
                             <p:stCondLst>
-                              <p:cond delay="300"/>
+                              <p:cond delay="150"/>
                             </p:stCondLst>
                             <p:childTnLst>
                               <p:par>
-                                <p:cTn id="9" dur="500" fill="hold" nodeType="afterEffect" grpId="0" presetID="9" presetClass="entr" presetSubtype="0">
+                                <p:cTn id="9" dur="1000" fill="hold" nodeType="afterEffect" grpId="0" presetID="22" presetClass="entr" presetSubtype="2">
                                   <p:stCondLst>
                                     <p:cond delay="0"/>
                                   </p:stCondLst>
@@ -4876,9 +4961,9 @@
                                         <p:strVal val="visible"/>
                                       </p:to>
                                     </p:set>
-                                    <p:animEffect transition="in" filter="fade">
-                                      <p:cBhvr>
-                                        <p:cTn id="8" dur="500"/>
+                                    <p:animEffect transition="in" filter="wipe(right)">
+                                      <p:cBhvr>
+                                        <p:cTn id="8" dur="1000"/>
                                         <p:tgtEl>
                                           <p:spTgt spid="3"/>
                                         </p:tgtEl>
@@ -4891,20 +4976,20 @@
                           </p:cTn>
                         </p:par>
                         <p:par>
-                          <p:cTn id="15" fill="hold">
+                          <p:cTn id="14" fill="hold">
                             <p:stCondLst>
-                              <p:cond delay="500"/>
+                              <p:cond delay="800"/>
                             </p:stCondLst>
                             <p:childTnLst>
                               <p:par>
-                                <p:cTn id="14" dur="700" fill="hold" nodeType="afterEffect" grpId="0" presetID="2" presetClass="entr" presetSubtype="4">
+                                <p:cTn id="13" dur="500" fill="hold" nodeType="afterEffect" grpId="0" presetID="9" presetClass="entr" presetSubtype="0">
                                   <p:stCondLst>
                                     <p:cond delay="0"/>
                                   </p:stCondLst>
                                   <p:childTnLst>
                                     <p:set>
                                       <p:cBhvr>
-                                        <p:cTn id="13" dur="1" fill="hold">
+                                        <p:cTn id="11" dur="1" fill="hold">
                                           <p:stCondLst>
                                             <p:cond delay="0"/>
                                           </p:stCondLst>
@@ -4920,52 +5005,58 @@
                                         <p:strVal val="visible"/>
                                       </p:to>
                                     </p:set>
-                                    <p:anim calcmode="lin" valueType="num">
-                                      <p:cBhvr additive="base">
-                                        <p:cTn id="11" dur="700" fill="hold"/>
+                                    <p:animEffect transition="in" filter="fade">
+                                      <p:cBhvr>
+                                        <p:cTn id="12" dur="500"/>
                                         <p:tgtEl>
                                           <p:spTgt spid="4"/>
                                         </p:tgtEl>
+                                      </p:cBhvr>
+                                    </p:animEffect>
+                                  </p:childTnLst>
+                                </p:cTn>
+                              </p:par>
+                            </p:childTnLst>
+                          </p:cTn>
+                        </p:par>
+                        <p:par>
+                          <p:cTn id="18" fill="hold">
+                            <p:stCondLst>
+                              <p:cond delay="1000"/>
+                            </p:stCondLst>
+                            <p:childTnLst>
+                              <p:par>
+                                <p:cTn id="17" dur="700" fill="hold" nodeType="afterEffect" grpId="0" presetID="9" presetClass="entr" presetSubtype="0">
+                                  <p:stCondLst>
+                                    <p:cond delay="0"/>
+                                  </p:stCondLst>
+                                  <p:childTnLst>
+                                    <p:set>
+                                      <p:cBhvr>
+                                        <p:cTn id="15" dur="1" fill="hold">
+                                          <p:stCondLst>
+                                            <p:cond delay="0"/>
+                                          </p:stCondLst>
+                                        </p:cTn>
+                                        <p:tgtEl>
+                                          <p:spTgt spid="5"/>
+                                        </p:tgtEl>
                                         <p:attrNameLst>
-                                          <p:attrName>ppt_x</p:attrName>
+                                          <p:attrName>style.visibility</p:attrName>
                                         </p:attrNameLst>
                                       </p:cBhvr>
-                                      <p:tavLst>
-                                        <p:tav tm="0">
-                                          <p:val>
-                                            <p:strVal val="#ppt_x"/>
-                                          </p:val>
-                                        </p:tav>
-                                        <p:tav tm="100000">
-                                          <p:val>
-                                            <p:strVal val="#ppt_x"/>
-                                          </p:val>
-                                        </p:tav>
-                                      </p:tavLst>
-                                    </p:anim>
-                                    <p:anim calcmode="lin" valueType="num">
-                                      <p:cBhvr additive="base">
-                                        <p:cTn id="12" dur="700" fill="hold"/>
-                                        <p:tgtEl>
-                                          <p:spTgt spid="4"/>
-                                        </p:tgtEl>
-                                        <p:attrNameLst>
-                                          <p:attrName>ppt_y</p:attrName>
-                                        </p:attrNameLst>
-                                      </p:cBhvr>
-                                      <p:tavLst>
-                                        <p:tav tm="0">
-                                          <p:val>
-                                            <p:strVal val="1+#ppt_h/2"/>
-                                          </p:val>
-                                        </p:tav>
-                                        <p:tav tm="100000">
-                                          <p:val>
-                                            <p:strVal val="#ppt_y"/>
-                                          </p:val>
-                                        </p:tav>
-                                      </p:tavLst>
-                                    </p:anim>
+                                      <p:to>
+                                        <p:strVal val="visible"/>
+                                      </p:to>
+                                    </p:set>
+                                    <p:animEffect transition="in" filter="fade">
+                                      <p:cBhvr>
+                                        <p:cTn id="16" dur="700"/>
+                                        <p:tgtEl>
+                                          <p:spTgt spid="5"/>
+                                        </p:tgtEl>
+                                      </p:cBhvr>
+                                    </p:animEffect>
                                   </p:childTnLst>
                                 </p:cTn>
                               </p:par>
@@ -5012,7 +5103,7 @@
       <p:grpSpPr/>
       <p:pic>
         <p:nvPicPr>
-          <p:cNvPr id="2" name="Picture 1" descr="hist_2.jpg"/>
+          <p:cNvPr id="2" name="Picture 1" descr="monument_bronze.jpg"/>
           <p:cNvPicPr>
             <a:picLocks noChangeAspect="1"/>
           </p:cNvPicPr>
@@ -5026,8 +5117,8 @@
         </p:blipFill>
         <p:spPr>
           <a:xfrm>
-            <a:off x="0" y="-629920"/>
-            <a:ext cx="12192000" cy="8117840"/>
+            <a:off x="0" y="0"/>
+            <a:ext cx="12192000" cy="6858000"/>
           </a:xfrm>
           <a:prstGeom prst="rect">
             <a:avLst/>
@@ -5111,7 +5202,7 @@
                 </a:solidFill>
                 <a:latin typeface="Calibri"/>
               </a:rPr>
-              <a:t>Северо-Осетинский университет имени К. Л. Хетагурова</a:t>
+              <a:t>Владикавказ — памятник Коста</a:t>
             </a:r>
           </a:p>
           <a:p>
@@ -5127,7 +5218,7 @@
                 </a:solidFill>
                 <a:latin typeface="Calibri"/>
               </a:rPr>
-              <a:t>Имя поэта носят университеты, сёла и улицы по всему Кавказу,</a:t>
+              <a:t>Прах поэта народ перенёс сюда и схоронил на Осетинской горке.</a:t>
             </a:r>
           </a:p>
           <a:p>
@@ -5143,7 +5234,7 @@
                 </a:solidFill>
                 <a:latin typeface="Calibri"/>
               </a:rPr>
-              <a:t>а его «Ирон фæндыр» переведён на десятки языков мира.</a:t>
+              <a:t>Именем Коста названы центральный парк, улицы и театр.</a:t>
             </a:r>
           </a:p>
         </p:txBody>
@@ -5154,7 +5245,7 @@
     <a:masterClrMapping/>
   </p:clrMapOvr>
   <p:transition spd="med">
-    <p:comb dir="horz"/>
+    <p:push dir="r"/>
   </p:transition>
   <p:timing>
     <p:tnLst>
@@ -5378,6 +5469,374 @@
         <p:nvPr/>
       </p:nvGrpSpPr>
       <p:grpSpPr/>
+      <p:pic>
+        <p:nvPicPr>
+          <p:cNvPr id="2" name="Picture 1" descr="church_4.jpg"/>
+          <p:cNvPicPr>
+            <a:picLocks noChangeAspect="1"/>
+          </p:cNvPicPr>
+          <p:nvPr/>
+        </p:nvPicPr>
+        <p:blipFill>
+          <a:blip r:embed="rId2"/>
+          <a:stretch>
+            <a:fillRect/>
+          </a:stretch>
+        </p:blipFill>
+        <p:spPr>
+          <a:xfrm>
+            <a:off x="0" y="-628650"/>
+            <a:ext cx="12192000" cy="8115300"/>
+          </a:xfrm>
+          <a:prstGeom prst="rect">
+            <a:avLst/>
+          </a:prstGeom>
+          <a:effectLst/>
+        </p:spPr>
+      </p:pic>
+      <p:sp>
+        <p:nvSpPr>
+          <p:cNvPr id="3" name="Rectangle 2"/>
+          <p:cNvSpPr/>
+          <p:nvPr/>
+        </p:nvSpPr>
+        <p:spPr>
+          <a:xfrm>
+            <a:off x="0" y="5440680"/>
+            <a:ext cx="12192000" cy="1417320"/>
+          </a:xfrm>
+          <a:prstGeom prst="rect">
+            <a:avLst/>
+          </a:prstGeom>
+          <a:solidFill>
+            <a:srgbClr val="050814">
+              <a:alpha val="62000"/>
+            </a:srgbClr>
+          </a:solidFill>
+          <a:ln>
+            <a:noFill/>
+          </a:ln>
+          <a:effectLst/>
+        </p:spPr>
+        <p:style>
+          <a:lnRef idx="1">
+            <a:schemeClr val="accent1"/>
+          </a:lnRef>
+          <a:fillRef idx="3">
+            <a:schemeClr val="accent1"/>
+          </a:fillRef>
+          <a:effectRef idx="2">
+            <a:schemeClr val="accent1"/>
+          </a:effectRef>
+          <a:fontRef idx="minor">
+            <a:schemeClr val="lt1"/>
+          </a:fontRef>
+        </p:style>
+        <p:txBody>
+          <a:bodyPr rtlCol="0" anchor="ctr"/>
+          <a:lstStyle/>
+          <a:p>
+            <a:pPr algn="ctr"/>
+          </a:p>
+        </p:txBody>
+      </p:sp>
+      <p:sp>
+        <p:nvSpPr>
+          <p:cNvPr id="4" name="TextBox 3"/>
+          <p:cNvSpPr txBox="1"/>
+          <p:nvPr/>
+        </p:nvSpPr>
+        <p:spPr>
+          <a:xfrm>
+            <a:off x="548640" y="5486400"/>
+            <a:ext cx="11091672" cy="1325880"/>
+          </a:xfrm>
+          <a:prstGeom prst="rect">
+            <a:avLst/>
+          </a:prstGeom>
+          <a:noFill/>
+        </p:spPr>
+        <p:txBody>
+          <a:bodyPr wrap="square" anchor="ctr">
+            <a:spAutoFit/>
+          </a:bodyPr>
+          <a:lstStyle/>
+          <a:p>
+            <a:pPr algn="ctr"/>
+            <a:r>
+              <a:rPr sz="2000" b="1" i="0">
+                <a:solidFill>
+                  <a:srgbClr val="FFFFFF"/>
+                </a:solidFill>
+                <a:latin typeface="Calibri"/>
+              </a:rPr>
+              <a:t>Осетинская горка — последний приют поэта</a:t>
+            </a:r>
+          </a:p>
+          <a:p>
+            <a:pPr algn="ctr">
+              <a:spcBef>
+                <a:spcPts val="300"/>
+              </a:spcBef>
+            </a:pPr>
+            <a:r>
+              <a:rPr sz="1300" b="0" i="0">
+                <a:solidFill>
+                  <a:srgbClr val="D8CEBE"/>
+                </a:solidFill>
+                <a:latin typeface="Calibri"/>
+              </a:rPr>
+              <a:t>Народ перенёс прах Коста с Кубани во Владикавказ и схоронил в ограде</a:t>
+            </a:r>
+          </a:p>
+          <a:p>
+            <a:pPr algn="ctr">
+              <a:spcBef>
+                <a:spcPts val="300"/>
+              </a:spcBef>
+            </a:pPr>
+            <a:r>
+              <a:rPr sz="1300" b="0" i="0">
+                <a:solidFill>
+                  <a:srgbClr val="D8CEBE"/>
+                </a:solidFill>
+                <a:latin typeface="Calibri"/>
+              </a:rPr>
+              <a:t>старейшего храма города — Осетинской церкви Рождества Богородицы.</a:t>
+            </a:r>
+          </a:p>
+        </p:txBody>
+      </p:sp>
+    </p:spTree>
+  </p:cSld>
+  <p:clrMapOvr>
+    <a:masterClrMapping/>
+  </p:clrMapOvr>
+  <p:transition spd="med">
+    <p:comb dir="horz"/>
+  </p:transition>
+  <p:timing>
+    <p:tnLst>
+      <p:par>
+        <p:cTn id="1" dur="indefinite" restart="never" nodeType="tmRoot">
+          <p:childTnLst>
+            <p:seq concurrent="1" nextAc="seek">
+              <p:cTn id="2" dur="indefinite" nodeType="mainSeq">
+                <p:childTnLst>
+                  <p:par>
+                    <p:cTn id="16" fill="hold">
+                      <p:stCondLst>
+                        <p:cond delay="0"/>
+                      </p:stCondLst>
+                      <p:childTnLst>
+                        <p:par>
+                          <p:cTn id="6" fill="hold">
+                            <p:stCondLst>
+                              <p:cond delay="0"/>
+                            </p:stCondLst>
+                            <p:childTnLst>
+                              <p:par>
+                                <p:cTn id="5" dur="400" fill="hold" nodeType="withEffect" grpId="0" presetID="9" presetClass="entr" presetSubtype="0">
+                                  <p:stCondLst>
+                                    <p:cond delay="0"/>
+                                  </p:stCondLst>
+                                  <p:childTnLst>
+                                    <p:set>
+                                      <p:cBhvr>
+                                        <p:cTn id="3" dur="1" fill="hold">
+                                          <p:stCondLst>
+                                            <p:cond delay="0"/>
+                                          </p:stCondLst>
+                                        </p:cTn>
+                                        <p:tgtEl>
+                                          <p:spTgt spid="2"/>
+                                        </p:tgtEl>
+                                        <p:attrNameLst>
+                                          <p:attrName>style.visibility</p:attrName>
+                                        </p:attrNameLst>
+                                      </p:cBhvr>
+                                      <p:to>
+                                        <p:strVal val="visible"/>
+                                      </p:to>
+                                    </p:set>
+                                    <p:animEffect transition="in" filter="fade">
+                                      <p:cBhvr>
+                                        <p:cTn id="4" dur="400"/>
+                                        <p:tgtEl>
+                                          <p:spTgt spid="2"/>
+                                        </p:tgtEl>
+                                      </p:cBhvr>
+                                    </p:animEffect>
+                                  </p:childTnLst>
+                                </p:cTn>
+                              </p:par>
+                            </p:childTnLst>
+                          </p:cTn>
+                        </p:par>
+                        <p:par>
+                          <p:cTn id="10" fill="hold">
+                            <p:stCondLst>
+                              <p:cond delay="300"/>
+                            </p:stCondLst>
+                            <p:childTnLst>
+                              <p:par>
+                                <p:cTn id="9" dur="500" fill="hold" nodeType="afterEffect" grpId="0" presetID="9" presetClass="entr" presetSubtype="0">
+                                  <p:stCondLst>
+                                    <p:cond delay="0"/>
+                                  </p:stCondLst>
+                                  <p:childTnLst>
+                                    <p:set>
+                                      <p:cBhvr>
+                                        <p:cTn id="7" dur="1" fill="hold">
+                                          <p:stCondLst>
+                                            <p:cond delay="0"/>
+                                          </p:stCondLst>
+                                        </p:cTn>
+                                        <p:tgtEl>
+                                          <p:spTgt spid="3"/>
+                                        </p:tgtEl>
+                                        <p:attrNameLst>
+                                          <p:attrName>style.visibility</p:attrName>
+                                        </p:attrNameLst>
+                                      </p:cBhvr>
+                                      <p:to>
+                                        <p:strVal val="visible"/>
+                                      </p:to>
+                                    </p:set>
+                                    <p:animEffect transition="in" filter="fade">
+                                      <p:cBhvr>
+                                        <p:cTn id="8" dur="500"/>
+                                        <p:tgtEl>
+                                          <p:spTgt spid="3"/>
+                                        </p:tgtEl>
+                                      </p:cBhvr>
+                                    </p:animEffect>
+                                  </p:childTnLst>
+                                </p:cTn>
+                              </p:par>
+                            </p:childTnLst>
+                          </p:cTn>
+                        </p:par>
+                        <p:par>
+                          <p:cTn id="15" fill="hold">
+                            <p:stCondLst>
+                              <p:cond delay="500"/>
+                            </p:stCondLst>
+                            <p:childTnLst>
+                              <p:par>
+                                <p:cTn id="14" dur="700" fill="hold" nodeType="afterEffect" grpId="0" presetID="2" presetClass="entr" presetSubtype="4">
+                                  <p:stCondLst>
+                                    <p:cond delay="0"/>
+                                  </p:stCondLst>
+                                  <p:childTnLst>
+                                    <p:set>
+                                      <p:cBhvr>
+                                        <p:cTn id="13" dur="1" fill="hold">
+                                          <p:stCondLst>
+                                            <p:cond delay="0"/>
+                                          </p:stCondLst>
+                                        </p:cTn>
+                                        <p:tgtEl>
+                                          <p:spTgt spid="4"/>
+                                        </p:tgtEl>
+                                        <p:attrNameLst>
+                                          <p:attrName>style.visibility</p:attrName>
+                                        </p:attrNameLst>
+                                      </p:cBhvr>
+                                      <p:to>
+                                        <p:strVal val="visible"/>
+                                      </p:to>
+                                    </p:set>
+                                    <p:anim calcmode="lin" valueType="num">
+                                      <p:cBhvr additive="base">
+                                        <p:cTn id="11" dur="700" fill="hold"/>
+                                        <p:tgtEl>
+                                          <p:spTgt spid="4"/>
+                                        </p:tgtEl>
+                                        <p:attrNameLst>
+                                          <p:attrName>ppt_x</p:attrName>
+                                        </p:attrNameLst>
+                                      </p:cBhvr>
+                                      <p:tavLst>
+                                        <p:tav tm="0">
+                                          <p:val>
+                                            <p:strVal val="#ppt_x"/>
+                                          </p:val>
+                                        </p:tav>
+                                        <p:tav tm="100000">
+                                          <p:val>
+                                            <p:strVal val="#ppt_x"/>
+                                          </p:val>
+                                        </p:tav>
+                                      </p:tavLst>
+                                    </p:anim>
+                                    <p:anim calcmode="lin" valueType="num">
+                                      <p:cBhvr additive="base">
+                                        <p:cTn id="12" dur="700" fill="hold"/>
+                                        <p:tgtEl>
+                                          <p:spTgt spid="4"/>
+                                        </p:tgtEl>
+                                        <p:attrNameLst>
+                                          <p:attrName>ppt_y</p:attrName>
+                                        </p:attrNameLst>
+                                      </p:cBhvr>
+                                      <p:tavLst>
+                                        <p:tav tm="0">
+                                          <p:val>
+                                            <p:strVal val="1+#ppt_h/2"/>
+                                          </p:val>
+                                        </p:tav>
+                                        <p:tav tm="100000">
+                                          <p:val>
+                                            <p:strVal val="#ppt_y"/>
+                                          </p:val>
+                                        </p:tav>
+                                      </p:tavLst>
+                                    </p:anim>
+                                  </p:childTnLst>
+                                </p:cTn>
+                              </p:par>
+                            </p:childTnLst>
+                          </p:cTn>
+                        </p:par>
+                      </p:childTnLst>
+                    </p:cTn>
+                  </p:par>
+                </p:childTnLst>
+              </p:cTn>
+              <p:prevCondLst>
+                <p:cond evt="onPrev" delay="0">
+                  <p:tgtEl>
+                    <p:sldTgt/>
+                  </p:tgtEl>
+                </p:cond>
+              </p:prevCondLst>
+              <p:nextCondLst>
+                <p:cond evt="onNext" delay="0">
+                  <p:tgtEl>
+                    <p:sldTgt/>
+                  </p:tgtEl>
+                </p:cond>
+              </p:nextCondLst>
+            </p:seq>
+          </p:childTnLst>
+        </p:cTn>
+      </p:par>
+    </p:tnLst>
+  </p:timing>
+</p:sld>
+</file>
+
+<file path=ppt/slides/slide15.xml><?xml version="1.0" encoding="utf-8"?>
+<p:sld xmlns:a="http://schemas.openxmlformats.org/drawingml/2006/main" xmlns:p="http://schemas.openxmlformats.org/presentationml/2006/main" xmlns:r="http://schemas.openxmlformats.org/officeDocument/2006/relationships">
+  <p:cSld>
+    <p:spTree>
+      <p:nvGrpSpPr>
+        <p:cNvPr id="1" name=""/>
+        <p:cNvGrpSpPr/>
+        <p:nvPr/>
+      </p:nvGrpSpPr>
+      <p:grpSpPr/>
       <p:sp>
         <p:nvSpPr>
           <p:cNvPr id="2" name="Rectangle 1"/>
@@ -6052,7 +6511,7 @@
                 </a:solidFill>
                 <a:latin typeface="Calibri"/>
               </a:rPr>
-              <a:t>02 / 14</a:t>
+              <a:t>02 / 15</a:t>
             </a:r>
           </a:p>
         </p:txBody>
@@ -6699,22 +7158,79 @@
         <p:nvPr/>
       </p:nvGrpSpPr>
       <p:grpSpPr/>
-      <p:sp>
-        <p:nvSpPr>
-          <p:cNvPr id="2" name="Rectangle 1"/>
+      <p:pic>
+        <p:nvPicPr>
+          <p:cNvPr id="2" name="Picture 1" descr="nar_village.jpg"/>
+          <p:cNvPicPr>
+            <a:picLocks noChangeAspect="1"/>
+          </p:cNvPicPr>
+          <p:nvPr/>
+        </p:nvPicPr>
+        <p:blipFill>
+          <a:blip r:embed="rId2"/>
+          <a:stretch>
+            <a:fillRect/>
+          </a:stretch>
+        </p:blipFill>
+        <p:spPr>
+          <a:xfrm>
+            <a:off x="0" y="-307258"/>
+            <a:ext cx="12192000" cy="7472516"/>
+          </a:xfrm>
+          <a:prstGeom prst="rect">
+            <a:avLst/>
+          </a:prstGeom>
+          <a:effectLst/>
+        </p:spPr>
+      </p:pic>
+      <p:pic>
+        <p:nvPicPr>
+          <p:cNvPr id="3" name="Picture 2" descr="nar_interior.jpg"/>
+          <p:cNvPicPr>
+            <a:picLocks noChangeAspect="1"/>
+          </p:cNvPicPr>
+          <p:nvPr/>
+        </p:nvPicPr>
+        <p:blipFill>
+          <a:blip r:embed="rId3"/>
+          <a:stretch>
+            <a:fillRect/>
+          </a:stretch>
+        </p:blipFill>
+        <p:spPr>
+          <a:xfrm>
+            <a:off x="7955279" y="548640"/>
+            <a:ext cx="3840480" cy="2880360"/>
+          </a:xfrm>
+          <a:prstGeom prst="rect">
+            <a:avLst/>
+          </a:prstGeom>
+          <a:ln w="38100">
+            <a:solidFill>
+              <a:srgbClr val="C9A227"/>
+            </a:solidFill>
+          </a:ln>
+          <a:effectLst/>
+        </p:spPr>
+      </p:pic>
+      <p:sp>
+        <p:nvSpPr>
+          <p:cNvPr id="4" name="Rectangle 3"/>
           <p:cNvSpPr/>
           <p:nvPr/>
         </p:nvSpPr>
         <p:spPr>
           <a:xfrm>
-            <a:off x="0" y="0"/>
-            <a:ext cx="12192000" cy="6858000"/>
+            <a:off x="0" y="5440680"/>
+            <a:ext cx="12192000" cy="1417320"/>
           </a:xfrm>
           <a:prstGeom prst="rect">
             <a:avLst/>
           </a:prstGeom>
           <a:solidFill>
-            <a:srgbClr val="171310"/>
+            <a:srgbClr val="050814">
+              <a:alpha val="62000"/>
+            </a:srgbClr>
           </a:solidFill>
           <a:ln>
             <a:noFill/>
@@ -6743,46 +7259,16 @@
           </a:p>
         </p:txBody>
       </p:sp>
-      <p:pic>
-        <p:nvPicPr>
-          <p:cNvPr id="3" name="Picture 2" descr="foto_2.jpg"/>
-          <p:cNvPicPr>
-            <a:picLocks noChangeAspect="1"/>
-          </p:cNvPicPr>
+      <p:sp>
+        <p:nvSpPr>
+          <p:cNvPr id="5" name="TextBox 4"/>
+          <p:cNvSpPr txBox="1"/>
           <p:nvPr/>
-        </p:nvPicPr>
-        <p:blipFill>
-          <a:blip r:embed="rId2"/>
-          <a:stretch>
-            <a:fillRect/>
-          </a:stretch>
-        </p:blipFill>
+        </p:nvSpPr>
         <p:spPr>
           <a:xfrm>
-            <a:off x="6583680" y="1371600"/>
-            <a:ext cx="4937760" cy="2666390"/>
-          </a:xfrm>
-          <a:prstGeom prst="rect">
-            <a:avLst/>
-          </a:prstGeom>
-          <a:ln w="31750">
-            <a:solidFill>
-              <a:srgbClr val="C9A227"/>
-            </a:solidFill>
-          </a:ln>
-          <a:effectLst/>
-        </p:spPr>
-      </p:pic>
-      <p:sp>
-        <p:nvSpPr>
-          <p:cNvPr id="4" name="TextBox 3"/>
-          <p:cNvSpPr txBox="1"/>
-          <p:nvPr/>
-        </p:nvSpPr>
-        <p:spPr>
-          <a:xfrm>
-            <a:off x="822960" y="1371600"/>
-            <a:ext cx="5486400" cy="822960"/>
+            <a:off x="548640" y="5486400"/>
+            <a:ext cx="11091672" cy="1325880"/>
           </a:xfrm>
           <a:prstGeom prst="rect">
             <a:avLst/>
@@ -6790,158 +7276,52 @@
           <a:noFill/>
         </p:spPr>
         <p:txBody>
-          <a:bodyPr wrap="square" anchor="t">
+          <a:bodyPr wrap="square" anchor="ctr">
             <a:spAutoFit/>
           </a:bodyPr>
           <a:lstStyle/>
           <a:p>
-            <a:pPr algn="l"/>
-            <a:r>
-              <a:rPr sz="3400" b="1" i="0">
+            <a:pPr algn="ctr"/>
+            <a:r>
+              <a:rPr sz="2000" b="1" i="0">
                 <a:solidFill>
                   <a:srgbClr val="FFFFFF"/>
                 </a:solidFill>
                 <a:latin typeface="Calibri"/>
               </a:rPr>
-              <a:t>Дорога к искусству</a:t>
-            </a:r>
-          </a:p>
-        </p:txBody>
-      </p:sp>
-      <p:sp>
-        <p:nvSpPr>
-          <p:cNvPr id="5" name="TextBox 4"/>
-          <p:cNvSpPr txBox="1"/>
-          <p:nvPr/>
-        </p:nvSpPr>
-        <p:spPr>
-          <a:xfrm>
-            <a:off x="868680" y="2468880"/>
-            <a:ext cx="5486400" cy="3840480"/>
-          </a:xfrm>
-          <a:prstGeom prst="rect">
-            <a:avLst/>
-          </a:prstGeom>
-          <a:noFill/>
-        </p:spPr>
-        <p:txBody>
-          <a:bodyPr wrap="square" anchor="t">
-            <a:spAutoFit/>
-          </a:bodyPr>
-          <a:lstStyle/>
-          <a:p>
-            <a:pPr algn="l"/>
-            <a:r>
-              <a:rPr sz="1500" b="0" i="0">
+              <a:t>Село Нар — родина поэта</a:t>
+            </a:r>
+          </a:p>
+          <a:p>
+            <a:pPr algn="ctr">
+              <a:spcBef>
+                <a:spcPts val="300"/>
+              </a:spcBef>
+            </a:pPr>
+            <a:r>
+              <a:rPr sz="1300" b="0" i="0">
                 <a:solidFill>
-                  <a:srgbClr val="FFFFFF"/>
+                  <a:srgbClr val="D8CEBE"/>
                 </a:solidFill>
                 <a:latin typeface="Calibri"/>
               </a:rPr>
-              <a:t>Владикавказская прогимназия и Ставропольская</a:t>
-            </a:r>
-          </a:p>
-          <a:p>
-            <a:pPr algn="l">
-              <a:spcAft>
-                <a:spcPts val="1200"/>
-              </a:spcAft>
+              <a:t>Здесь 15 октября 1859 года родился Коста; ныне — мемориальный дом-музей.</a:t>
+            </a:r>
+          </a:p>
+          <a:p>
+            <a:pPr algn="ctr">
+              <a:spcBef>
+                <a:spcPts val="300"/>
+              </a:spcBef>
             </a:pPr>
             <a:r>
-              <a:rPr sz="1500" b="0" i="0">
+              <a:rPr sz="1300" b="0" i="0">
                 <a:solidFill>
-                  <a:srgbClr val="FFFFFF"/>
+                  <a:srgbClr val="D8CEBE"/>
                 </a:solidFill>
                 <a:latin typeface="Calibri"/>
               </a:rPr>
-              <a:t>гимназия — здесь открылся дар к слову и кисти.</a:t>
-            </a:r>
-          </a:p>
-          <a:p>
-            <a:pPr algn="l"/>
-            <a:r>
-              <a:rPr sz="1500" b="0" i="0">
-                <a:solidFill>
-                  <a:srgbClr val="C9A227"/>
-                </a:solidFill>
-                <a:latin typeface="Calibri"/>
-              </a:rPr>
-              <a:t>Петербургская академия художеств, 1881 —</a:t>
-            </a:r>
-          </a:p>
-          <a:p>
-            <a:pPr algn="l">
-              <a:spcAft>
-                <a:spcPts val="1200"/>
-              </a:spcAft>
-            </a:pPr>
-            <a:r>
-              <a:rPr sz="1500" b="0" i="0">
-                <a:solidFill>
-                  <a:srgbClr val="C9A227"/>
-                </a:solidFill>
-                <a:latin typeface="Calibri"/>
-              </a:rPr>
-              <a:t>мечта о живописи стала делом жизни.</a:t>
-            </a:r>
-          </a:p>
-          <a:p>
-            <a:pPr algn="l"/>
-            <a:r>
-              <a:rPr sz="1500" b="0" i="0">
-                <a:solidFill>
-                  <a:srgbClr val="FFFFFF"/>
-                </a:solidFill>
-                <a:latin typeface="Calibri"/>
-              </a:rPr>
-              <a:t>Из-за бедности покинул академию, но вернул</a:t>
-            </a:r>
-          </a:p>
-          <a:p>
-            <a:pPr algn="l"/>
-            <a:r>
-              <a:rPr sz="1500" b="0" i="0">
-                <a:solidFill>
-                  <a:srgbClr val="FFFFFF"/>
-                </a:solidFill>
-                <a:latin typeface="Calibri"/>
-              </a:rPr>
-              <a:t>живопись в Осетию: портрет, пейзаж, фреска.</a:t>
-            </a:r>
-          </a:p>
-        </p:txBody>
-      </p:sp>
-      <p:sp>
-        <p:nvSpPr>
-          <p:cNvPr id="6" name="TextBox 5"/>
-          <p:cNvSpPr txBox="1"/>
-          <p:nvPr/>
-        </p:nvSpPr>
-        <p:spPr>
-          <a:xfrm>
-            <a:off x="11094720" y="6400800"/>
-            <a:ext cx="914400" cy="320040"/>
-          </a:xfrm>
-          <a:prstGeom prst="rect">
-            <a:avLst/>
-          </a:prstGeom>
-          <a:noFill/>
-        </p:spPr>
-        <p:txBody>
-          <a:bodyPr wrap="square" anchor="t">
-            <a:spAutoFit/>
-          </a:bodyPr>
-          <a:lstStyle/>
-          <a:p>
-            <a:pPr algn="r"/>
-            <a:r>
-              <a:rPr sz="1100" b="0" i="0">
-                <a:solidFill>
-                  <a:srgbClr val="CFD8E3"/>
-                </a:solidFill>
-                <a:latin typeface="Calibri"/>
-              </a:rPr>
-              <a:t>04 / 14</a:t>
+              <a:t>Каменные стены, очаг и утварь горцев хранят память о его детстве.</a:t>
             </a:r>
           </a:p>
         </p:txBody>
@@ -6975,7 +7355,7 @@
                             </p:stCondLst>
                             <p:childTnLst>
                               <p:par>
-                                <p:cTn id="5" dur="300" fill="hold" nodeType="withEffect" grpId="0" presetID="9" presetClass="entr" presetSubtype="0">
+                                <p:cTn id="5" dur="400" fill="hold" nodeType="withEffect" grpId="0" presetID="9" presetClass="entr" presetSubtype="0">
                                   <p:stCondLst>
                                     <p:cond delay="0"/>
                                   </p:stCondLst>
@@ -7000,7 +7380,7 @@
                                     </p:set>
                                     <p:animEffect transition="in" filter="fade">
                                       <p:cBhvr>
-                                        <p:cTn id="4" dur="300"/>
+                                        <p:cTn id="4" dur="400"/>
                                         <p:tgtEl>
                                           <p:spTgt spid="2"/>
                                         </p:tgtEl>
@@ -7013,26 +7393,114 @@
                           </p:cTn>
                         </p:par>
                         <p:par>
-                          <p:cTn id="11" fill="hold">
+                          <p:cTn id="10" fill="hold">
                             <p:stCondLst>
-                              <p:cond delay="100"/>
+                              <p:cond delay="400"/>
                             </p:stCondLst>
                             <p:childTnLst>
                               <p:par>
-                                <p:cTn id="10" dur="700" fill="hold" nodeType="afterEffect" grpId="0" presetID="2" presetClass="entr" presetSubtype="8">
+                                <p:cTn id="9" dur="900" fill="hold" nodeType="afterEffect" grpId="0" presetID="22" presetClass="entr" presetSubtype="8">
                                   <p:stCondLst>
                                     <p:cond delay="0"/>
                                   </p:stCondLst>
                                   <p:childTnLst>
                                     <p:set>
                                       <p:cBhvr>
-                                        <p:cTn id="9" dur="1" fill="hold">
+                                        <p:cTn id="7" dur="1" fill="hold">
                                           <p:stCondLst>
                                             <p:cond delay="0"/>
                                           </p:stCondLst>
                                         </p:cTn>
                                         <p:tgtEl>
+                                          <p:spTgt spid="3"/>
+                                        </p:tgtEl>
+                                        <p:attrNameLst>
+                                          <p:attrName>style.visibility</p:attrName>
+                                        </p:attrNameLst>
+                                      </p:cBhvr>
+                                      <p:to>
+                                        <p:strVal val="visible"/>
+                                      </p:to>
+                                    </p:set>
+                                    <p:animEffect transition="in" filter="wipe(left)">
+                                      <p:cBhvr>
+                                        <p:cTn id="8" dur="900"/>
+                                        <p:tgtEl>
+                                          <p:spTgt spid="3"/>
+                                        </p:tgtEl>
+                                      </p:cBhvr>
+                                    </p:animEffect>
+                                  </p:childTnLst>
+                                </p:cTn>
+                              </p:par>
+                            </p:childTnLst>
+                          </p:cTn>
+                        </p:par>
+                        <p:par>
+                          <p:cTn id="14" fill="hold">
+                            <p:stCondLst>
+                              <p:cond delay="300"/>
+                            </p:stCondLst>
+                            <p:childTnLst>
+                              <p:par>
+                                <p:cTn id="13" dur="500" fill="hold" nodeType="afterEffect" grpId="0" presetID="9" presetClass="entr" presetSubtype="0">
+                                  <p:stCondLst>
+                                    <p:cond delay="0"/>
+                                  </p:stCondLst>
+                                  <p:childTnLst>
+                                    <p:set>
+                                      <p:cBhvr>
+                                        <p:cTn id="11" dur="1" fill="hold">
+                                          <p:stCondLst>
+                                            <p:cond delay="0"/>
+                                          </p:stCondLst>
+                                        </p:cTn>
+                                        <p:tgtEl>
                                           <p:spTgt spid="4"/>
+                                        </p:tgtEl>
+                                        <p:attrNameLst>
+                                          <p:attrName>style.visibility</p:attrName>
+                                        </p:attrNameLst>
+                                      </p:cBhvr>
+                                      <p:to>
+                                        <p:strVal val="visible"/>
+                                      </p:to>
+                                    </p:set>
+                                    <p:animEffect transition="in" filter="fade">
+                                      <p:cBhvr>
+                                        <p:cTn id="12" dur="500"/>
+                                        <p:tgtEl>
+                                          <p:spTgt spid="4"/>
+                                        </p:tgtEl>
+                                      </p:cBhvr>
+                                    </p:animEffect>
+                                  </p:childTnLst>
+                                </p:cTn>
+                              </p:par>
+                            </p:childTnLst>
+                          </p:cTn>
+                        </p:par>
+                        <p:par>
+                          <p:cTn id="19" fill="hold">
+                            <p:stCondLst>
+                              <p:cond delay="500"/>
+                            </p:stCondLst>
+                            <p:childTnLst>
+                              <p:par>
+                                <p:cTn id="18" dur="700" fill="hold" nodeType="afterEffect" grpId="0" presetID="2" presetClass="entr" presetSubtype="4">
+                                  <p:stCondLst>
+                                    <p:cond delay="0"/>
+                                  </p:stCondLst>
+                                  <p:childTnLst>
+                                    <p:set>
+                                      <p:cBhvr>
+                                        <p:cTn id="17" dur="1" fill="hold">
+                                          <p:stCondLst>
+                                            <p:cond delay="0"/>
+                                          </p:stCondLst>
+                                        </p:cTn>
+                                        <p:tgtEl>
+                                          <p:spTgt spid="5"/>
                                         </p:tgtEl>
                                         <p:attrNameLst>
                                           <p:attrName>style.visibility</p:attrName>
@@ -7044,9 +7512,9 @@
                                     </p:set>
                                     <p:anim calcmode="lin" valueType="num">
                                       <p:cBhvr additive="base">
-                                        <p:cTn id="7" dur="700" fill="hold"/>
-                                        <p:tgtEl>
-                                          <p:spTgt spid="4"/>
+                                        <p:cTn id="15" dur="700" fill="hold"/>
+                                        <p:tgtEl>
+                                          <p:spTgt spid="5"/>
                                         </p:tgtEl>
                                         <p:attrNameLst>
                                           <p:attrName>ppt_x</p:attrName>
@@ -7055,7 +7523,7 @@
                                       <p:tavLst>
                                         <p:tav tm="0">
                                           <p:val>
-                                            <p:strVal val="0-#ppt_w/2"/>
+                                            <p:strVal val="#ppt_x"/>
                                           </p:val>
                                         </p:tav>
                                         <p:tav tm="100000">
@@ -7067,9 +7535,9 @@
                                     </p:anim>
                                     <p:anim calcmode="lin" valueType="num">
                                       <p:cBhvr additive="base">
-                                        <p:cTn id="8" dur="700" fill="hold"/>
-                                        <p:tgtEl>
-                                          <p:spTgt spid="4"/>
+                                        <p:cTn id="16" dur="700" fill="hold"/>
+                                        <p:tgtEl>
+                                          <p:spTgt spid="5"/>
                                         </p:tgtEl>
                                         <p:attrNameLst>
                                           <p:attrName>ppt_y</p:attrName>
@@ -7078,7 +7546,7 @@
                                       <p:tavLst>
                                         <p:tav tm="0">
                                           <p:val>
-                                            <p:strVal val="#ppt_y"/>
+                                            <p:strVal val="1+#ppt_h/2"/>
                                           </p:val>
                                         </p:tav>
                                         <p:tav tm="100000">
@@ -7088,94 +7556,6 @@
                                         </p:tav>
                                       </p:tavLst>
                                     </p:anim>
-                                  </p:childTnLst>
-                                </p:cTn>
-                              </p:par>
-                            </p:childTnLst>
-                          </p:cTn>
-                        </p:par>
-                        <p:par>
-                          <p:cTn id="15" fill="hold">
-                            <p:stCondLst>
-                              <p:cond delay="400"/>
-                            </p:stCondLst>
-                            <p:childTnLst>
-                              <p:par>
-                                <p:cTn id="14" dur="900" fill="hold" nodeType="afterEffect" grpId="0" presetID="22" presetClass="entr" presetSubtype="8">
-                                  <p:stCondLst>
-                                    <p:cond delay="0"/>
-                                  </p:stCondLst>
-                                  <p:childTnLst>
-                                    <p:set>
-                                      <p:cBhvr>
-                                        <p:cTn id="12" dur="1" fill="hold">
-                                          <p:stCondLst>
-                                            <p:cond delay="0"/>
-                                          </p:stCondLst>
-                                        </p:cTn>
-                                        <p:tgtEl>
-                                          <p:spTgt spid="3"/>
-                                        </p:tgtEl>
-                                        <p:attrNameLst>
-                                          <p:attrName>style.visibility</p:attrName>
-                                        </p:attrNameLst>
-                                      </p:cBhvr>
-                                      <p:to>
-                                        <p:strVal val="visible"/>
-                                      </p:to>
-                                    </p:set>
-                                    <p:animEffect transition="in" filter="wipe(left)">
-                                      <p:cBhvr>
-                                        <p:cTn id="13" dur="900"/>
-                                        <p:tgtEl>
-                                          <p:spTgt spid="3"/>
-                                        </p:tgtEl>
-                                      </p:cBhvr>
-                                    </p:animEffect>
-                                  </p:childTnLst>
-                                </p:cTn>
-                              </p:par>
-                            </p:childTnLst>
-                          </p:cTn>
-                        </p:par>
-                        <p:par>
-                          <p:cTn id="19" fill="hold">
-                            <p:stCondLst>
-                              <p:cond delay="900"/>
-                            </p:stCondLst>
-                            <p:childTnLst>
-                              <p:par>
-                                <p:cTn id="18" dur="900" fill="hold" nodeType="afterEffect" grpId="0" presetID="9" presetClass="entr" presetSubtype="0">
-                                  <p:stCondLst>
-                                    <p:cond delay="0"/>
-                                  </p:stCondLst>
-                                  <p:childTnLst>
-                                    <p:set>
-                                      <p:cBhvr>
-                                        <p:cTn id="16" dur="1" fill="hold">
-                                          <p:stCondLst>
-                                            <p:cond delay="0"/>
-                                          </p:stCondLst>
-                                        </p:cTn>
-                                        <p:tgtEl>
-                                          <p:spTgt spid="5"/>
-                                        </p:tgtEl>
-                                        <p:attrNameLst>
-                                          <p:attrName>style.visibility</p:attrName>
-                                        </p:attrNameLst>
-                                      </p:cBhvr>
-                                      <p:to>
-                                        <p:strVal val="visible"/>
-                                      </p:to>
-                                    </p:set>
-                                    <p:animEffect transition="in" filter="fade">
-                                      <p:cBhvr>
-                                        <p:cTn id="17" dur="900"/>
-                                        <p:tgtEl>
-                                          <p:spTgt spid="5"/>
-                                        </p:tgtEl>
-                                      </p:cBhvr>
-                                    </p:animEffect>
                                   </p:childTnLst>
                                 </p:cTn>
                               </p:par>
@@ -7264,50 +7644,36 @@
           </a:p>
         </p:txBody>
       </p:sp>
-      <p:sp>
-        <p:nvSpPr>
-          <p:cNvPr id="3" name="Rectangle 2"/>
-          <p:cNvSpPr/>
+      <p:pic>
+        <p:nvPicPr>
+          <p:cNvPr id="3" name="Picture 2" descr="foto_2.jpg"/>
+          <p:cNvPicPr>
+            <a:picLocks noChangeAspect="1"/>
+          </p:cNvPicPr>
           <p:nvPr/>
-        </p:nvSpPr>
+        </p:nvPicPr>
+        <p:blipFill>
+          <a:blip r:embed="rId2"/>
+          <a:stretch>
+            <a:fillRect/>
+          </a:stretch>
+        </p:blipFill>
         <p:spPr>
           <a:xfrm>
-            <a:off x="4480560" y="1828800"/>
-            <a:ext cx="3200400" cy="50800"/>
+            <a:off x="6583680" y="1371600"/>
+            <a:ext cx="4937760" cy="2666390"/>
           </a:xfrm>
           <a:prstGeom prst="rect">
             <a:avLst/>
           </a:prstGeom>
-          <a:solidFill>
-            <a:srgbClr val="C9A227"/>
-          </a:solidFill>
-          <a:ln>
-            <a:noFill/>
+          <a:ln w="31750">
+            <a:solidFill>
+              <a:srgbClr val="C9A227"/>
+            </a:solidFill>
           </a:ln>
           <a:effectLst/>
         </p:spPr>
-        <p:style>
-          <a:lnRef idx="1">
-            <a:schemeClr val="accent1"/>
-          </a:lnRef>
-          <a:fillRef idx="3">
-            <a:schemeClr val="accent1"/>
-          </a:fillRef>
-          <a:effectRef idx="2">
-            <a:schemeClr val="accent1"/>
-          </a:effectRef>
-          <a:fontRef idx="minor">
-            <a:schemeClr val="lt1"/>
-          </a:fontRef>
-        </p:style>
-        <p:txBody>
-          <a:bodyPr rtlCol="0" anchor="ctr"/>
-          <a:lstStyle/>
-          <a:p>
-            <a:pPr algn="ctr"/>
-          </a:p>
-        </p:txBody>
-      </p:sp>
+      </p:pic>
       <p:sp>
         <p:nvSpPr>
           <p:cNvPr id="4" name="TextBox 3"/>
@@ -7316,8 +7682,8 @@
         </p:nvSpPr>
         <p:spPr>
           <a:xfrm>
-            <a:off x="914400" y="2103120"/>
-            <a:ext cx="10360152" cy="1463040"/>
+            <a:off x="822960" y="1371600"/>
+            <a:ext cx="5486400" cy="822960"/>
           </a:xfrm>
           <a:prstGeom prst="rect">
             <a:avLst/>
@@ -7330,15 +7696,15 @@
           </a:bodyPr>
           <a:lstStyle/>
           <a:p>
-            <a:pPr algn="ctr"/>
-            <a:r>
-              <a:rPr sz="5800" b="1" i="0">
+            <a:pPr algn="l"/>
+            <a:r>
+              <a:rPr sz="3400" b="1" i="0">
                 <a:solidFill>
-                  <a:srgbClr val="C9A227"/>
+                  <a:srgbClr val="FFFFFF"/>
                 </a:solidFill>
                 <a:latin typeface="Calibri"/>
               </a:rPr>
-              <a:t>«Ирон фæндыр»</a:t>
+              <a:t>Дорога к искусству</a:t>
             </a:r>
           </a:p>
         </p:txBody>
@@ -7351,8 +7717,8 @@
         </p:nvSpPr>
         <p:spPr>
           <a:xfrm>
-            <a:off x="1371600" y="3657600"/>
-            <a:ext cx="9445752" cy="914400"/>
+            <a:off x="868680" y="2468880"/>
+            <a:ext cx="5486400" cy="3840480"/>
           </a:xfrm>
           <a:prstGeom prst="rect">
             <a:avLst/>
@@ -7365,81 +7731,90 @@
           </a:bodyPr>
           <a:lstStyle/>
           <a:p>
-            <a:pPr algn="ctr"/>
-            <a:r>
-              <a:rPr sz="1800" b="0" i="0">
+            <a:pPr algn="l"/>
+            <a:r>
+              <a:rPr sz="1500" b="0" i="0">
                 <a:solidFill>
                   <a:srgbClr val="FFFFFF"/>
                 </a:solidFill>
                 <a:latin typeface="Calibri"/>
               </a:rPr>
-              <a:t>«Осетинская лира», 1899 — первый сборник осетинской поэзии,</a:t>
-            </a:r>
-          </a:p>
-          <a:p>
-            <a:pPr algn="ctr"/>
-            <a:r>
-              <a:rPr sz="1800" b="0" i="0">
+              <a:t>Владикавказская прогимназия и Ставропольская</a:t>
+            </a:r>
+          </a:p>
+          <a:p>
+            <a:pPr algn="l">
+              <a:spcAft>
+                <a:spcPts val="1200"/>
+              </a:spcAft>
+            </a:pPr>
+            <a:r>
+              <a:rPr sz="1500" b="0" i="0">
                 <a:solidFill>
                   <a:srgbClr val="FFFFFF"/>
                 </a:solidFill>
                 <a:latin typeface="Calibri"/>
               </a:rPr>
-              <a:t>с него начинается осетинская литература и литературный язык</a:t>
-            </a:r>
-          </a:p>
-        </p:txBody>
-      </p:sp>
-      <p:sp>
-        <p:nvSpPr>
-          <p:cNvPr id="6" name="TextBox 5"/>
-          <p:cNvSpPr txBox="1"/>
-          <p:nvPr/>
-        </p:nvSpPr>
-        <p:spPr>
-          <a:xfrm>
-            <a:off x="1371600" y="4709160"/>
-            <a:ext cx="9445752" cy="822960"/>
-          </a:xfrm>
-          <a:prstGeom prst="rect">
-            <a:avLst/>
-          </a:prstGeom>
-          <a:noFill/>
-        </p:spPr>
-        <p:txBody>
-          <a:bodyPr wrap="square" anchor="t">
-            <a:spAutoFit/>
-          </a:bodyPr>
-          <a:lstStyle/>
-          <a:p>
-            <a:pPr algn="ctr"/>
-            <a:r>
-              <a:rPr sz="1400" b="0" i="0">
+              <a:t>гимназия — здесь открылся дар к слову и кисти.</a:t>
+            </a:r>
+          </a:p>
+          <a:p>
+            <a:pPr algn="l"/>
+            <a:r>
+              <a:rPr sz="1500" b="0" i="0">
                 <a:solidFill>
-                  <a:srgbClr val="8A8578"/>
+                  <a:srgbClr val="C9A227"/>
                 </a:solidFill>
                 <a:latin typeface="Calibri"/>
               </a:rPr>
-              <a:t>В сборнике — стихи о труде, любви и свободе, первые стихи</a:t>
-            </a:r>
-          </a:p>
-          <a:p>
-            <a:pPr algn="ctr"/>
-            <a:r>
-              <a:rPr sz="1400" b="0" i="0">
+              <a:t>Петербургская академия художеств, 1881 —</a:t>
+            </a:r>
+          </a:p>
+          <a:p>
+            <a:pPr algn="l">
+              <a:spcAft>
+                <a:spcPts val="1200"/>
+              </a:spcAft>
+            </a:pPr>
+            <a:r>
+              <a:rPr sz="1500" b="0" i="0">
                 <a:solidFill>
-                  <a:srgbClr val="8A8578"/>
+                  <a:srgbClr val="C9A227"/>
                 </a:solidFill>
                 <a:latin typeface="Calibri"/>
               </a:rPr>
-              <a:t>для детей на осетинском; «Завещание» переведено на 108 языков</a:t>
-            </a:r>
-          </a:p>
-        </p:txBody>
-      </p:sp>
-      <p:sp>
-        <p:nvSpPr>
-          <p:cNvPr id="7" name="TextBox 6"/>
+              <a:t>мечта о живописи стала делом жизни.</a:t>
+            </a:r>
+          </a:p>
+          <a:p>
+            <a:pPr algn="l"/>
+            <a:r>
+              <a:rPr sz="1500" b="0" i="0">
+                <a:solidFill>
+                  <a:srgbClr val="FFFFFF"/>
+                </a:solidFill>
+                <a:latin typeface="Calibri"/>
+              </a:rPr>
+              <a:t>Из-за бедности покинул академию, но вернул</a:t>
+            </a:r>
+          </a:p>
+          <a:p>
+            <a:pPr algn="l"/>
+            <a:r>
+              <a:rPr sz="1500" b="0" i="0">
+                <a:solidFill>
+                  <a:srgbClr val="FFFFFF"/>
+                </a:solidFill>
+                <a:latin typeface="Calibri"/>
+              </a:rPr>
+              <a:t>живопись в Осетию: портрет, пейзаж, фреска.</a:t>
+            </a:r>
+          </a:p>
+        </p:txBody>
+      </p:sp>
+      <p:sp>
+        <p:nvSpPr>
+          <p:cNvPr id="6" name="TextBox 5"/>
           <p:cNvSpPr txBox="1"/>
           <p:nvPr/>
         </p:nvSpPr>
@@ -7467,7 +7842,7 @@
                 </a:solidFill>
                 <a:latin typeface="Calibri"/>
               </a:rPr>
-              <a:t>05 / 14</a:t>
+              <a:t>05 / 15</a:t>
             </a:r>
           </a:p>
         </p:txBody>
@@ -7478,7 +7853,7 @@
     <a:masterClrMapping/>
   </p:clrMapOvr>
   <p:transition spd="med">
-    <p:split orient="horz"/>
+    <p:cover dir="l"/>
   </p:transition>
   <p:timing>
     <p:tnLst>
@@ -7489,7 +7864,7 @@
               <p:cTn id="2" dur="indefinite" nodeType="mainSeq">
                 <p:childTnLst>
                   <p:par>
-                    <p:cTn id="23" fill="hold">
+                    <p:cTn id="20" fill="hold">
                       <p:stCondLst>
                         <p:cond delay="0"/>
                       </p:stCondLst>
@@ -7539,26 +7914,26 @@
                           </p:cTn>
                         </p:par>
                         <p:par>
-                          <p:cTn id="10" fill="hold">
+                          <p:cTn id="11" fill="hold">
                             <p:stCondLst>
-                              <p:cond delay="200"/>
+                              <p:cond delay="100"/>
                             </p:stCondLst>
                             <p:childTnLst>
                               <p:par>
-                                <p:cTn id="9" dur="600" fill="hold" nodeType="afterEffect" grpId="0" presetID="22" presetClass="entr" presetSubtype="2">
+                                <p:cTn id="10" dur="700" fill="hold" nodeType="afterEffect" grpId="0" presetID="2" presetClass="entr" presetSubtype="8">
                                   <p:stCondLst>
                                     <p:cond delay="0"/>
                                   </p:stCondLst>
                                   <p:childTnLst>
                                     <p:set>
                                       <p:cBhvr>
-                                        <p:cTn id="7" dur="1" fill="hold">
+                                        <p:cTn id="9" dur="1" fill="hold">
                                           <p:stCondLst>
                                             <p:cond delay="0"/>
                                           </p:stCondLst>
                                         </p:cTn>
                                         <p:tgtEl>
-                                          <p:spTgt spid="3"/>
+                                          <p:spTgt spid="4"/>
                                         </p:tgtEl>
                                         <p:attrNameLst>
                                           <p:attrName>style.visibility</p:attrName>
@@ -7568,9 +7943,91 @@
                                         <p:strVal val="visible"/>
                                       </p:to>
                                     </p:set>
-                                    <p:animEffect transition="in" filter="wipe(right)">
-                                      <p:cBhvr>
-                                        <p:cTn id="8" dur="600"/>
+                                    <p:anim calcmode="lin" valueType="num">
+                                      <p:cBhvr additive="base">
+                                        <p:cTn id="7" dur="700" fill="hold"/>
+                                        <p:tgtEl>
+                                          <p:spTgt spid="4"/>
+                                        </p:tgtEl>
+                                        <p:attrNameLst>
+                                          <p:attrName>ppt_x</p:attrName>
+                                        </p:attrNameLst>
+                                      </p:cBhvr>
+                                      <p:tavLst>
+                                        <p:tav tm="0">
+                                          <p:val>
+                                            <p:strVal val="0-#ppt_w/2"/>
+                                          </p:val>
+                                        </p:tav>
+                                        <p:tav tm="100000">
+                                          <p:val>
+                                            <p:strVal val="#ppt_x"/>
+                                          </p:val>
+                                        </p:tav>
+                                      </p:tavLst>
+                                    </p:anim>
+                                    <p:anim calcmode="lin" valueType="num">
+                                      <p:cBhvr additive="base">
+                                        <p:cTn id="8" dur="700" fill="hold"/>
+                                        <p:tgtEl>
+                                          <p:spTgt spid="4"/>
+                                        </p:tgtEl>
+                                        <p:attrNameLst>
+                                          <p:attrName>ppt_y</p:attrName>
+                                        </p:attrNameLst>
+                                      </p:cBhvr>
+                                      <p:tavLst>
+                                        <p:tav tm="0">
+                                          <p:val>
+                                            <p:strVal val="#ppt_y"/>
+                                          </p:val>
+                                        </p:tav>
+                                        <p:tav tm="100000">
+                                          <p:val>
+                                            <p:strVal val="#ppt_y"/>
+                                          </p:val>
+                                        </p:tav>
+                                      </p:tavLst>
+                                    </p:anim>
+                                  </p:childTnLst>
+                                </p:cTn>
+                              </p:par>
+                            </p:childTnLst>
+                          </p:cTn>
+                        </p:par>
+                        <p:par>
+                          <p:cTn id="15" fill="hold">
+                            <p:stCondLst>
+                              <p:cond delay="400"/>
+                            </p:stCondLst>
+                            <p:childTnLst>
+                              <p:par>
+                                <p:cTn id="14" dur="900" fill="hold" nodeType="afterEffect" grpId="0" presetID="22" presetClass="entr" presetSubtype="8">
+                                  <p:stCondLst>
+                                    <p:cond delay="0"/>
+                                  </p:stCondLst>
+                                  <p:childTnLst>
+                                    <p:set>
+                                      <p:cBhvr>
+                                        <p:cTn id="12" dur="1" fill="hold">
+                                          <p:stCondLst>
+                                            <p:cond delay="0"/>
+                                          </p:stCondLst>
+                                        </p:cTn>
+                                        <p:tgtEl>
+                                          <p:spTgt spid="3"/>
+                                        </p:tgtEl>
+                                        <p:attrNameLst>
+                                          <p:attrName>style.visibility</p:attrName>
+                                        </p:attrNameLst>
+                                      </p:cBhvr>
+                                      <p:to>
+                                        <p:strVal val="visible"/>
+                                      </p:to>
+                                    </p:set>
+                                    <p:animEffect transition="in" filter="wipe(left)">
+                                      <p:cBhvr>
+                                        <p:cTn id="13" dur="900"/>
                                         <p:tgtEl>
                                           <p:spTgt spid="3"/>
                                         </p:tgtEl>
@@ -7583,64 +8040,20 @@
                           </p:cTn>
                         </p:par>
                         <p:par>
-                          <p:cTn id="14" fill="hold">
+                          <p:cTn id="19" fill="hold">
                             <p:stCondLst>
-                              <p:cond delay="400"/>
+                              <p:cond delay="900"/>
                             </p:stCondLst>
                             <p:childTnLst>
                               <p:par>
-                                <p:cTn id="13" dur="900" fill="hold" nodeType="afterEffect" grpId="0" presetID="22" presetClass="entr" presetSubtype="4">
+                                <p:cTn id="18" dur="900" fill="hold" nodeType="afterEffect" grpId="0" presetID="9" presetClass="entr" presetSubtype="0">
                                   <p:stCondLst>
                                     <p:cond delay="0"/>
                                   </p:stCondLst>
                                   <p:childTnLst>
                                     <p:set>
                                       <p:cBhvr>
-                                        <p:cTn id="11" dur="1" fill="hold">
-                                          <p:stCondLst>
-                                            <p:cond delay="0"/>
-                                          </p:stCondLst>
-                                        </p:cTn>
-                                        <p:tgtEl>
-                                          <p:spTgt spid="4"/>
-                                        </p:tgtEl>
-                                        <p:attrNameLst>
-                                          <p:attrName>style.visibility</p:attrName>
-                                        </p:attrNameLst>
-                                      </p:cBhvr>
-                                      <p:to>
-                                        <p:strVal val="visible"/>
-                                      </p:to>
-                                    </p:set>
-                                    <p:animEffect transition="in" filter="wipe(down)">
-                                      <p:cBhvr>
-                                        <p:cTn id="12" dur="900"/>
-                                        <p:tgtEl>
-                                          <p:spTgt spid="4"/>
-                                        </p:tgtEl>
-                                      </p:cBhvr>
-                                    </p:animEffect>
-                                  </p:childTnLst>
-                                </p:cTn>
-                              </p:par>
-                            </p:childTnLst>
-                          </p:cTn>
-                        </p:par>
-                        <p:par>
-                          <p:cTn id="18" fill="hold">
-                            <p:stCondLst>
-                              <p:cond delay="1200"/>
-                            </p:stCondLst>
-                            <p:childTnLst>
-                              <p:par>
-                                <p:cTn id="17" dur="700" fill="hold" nodeType="afterEffect" grpId="0" presetID="9" presetClass="entr" presetSubtype="0">
-                                  <p:stCondLst>
-                                    <p:cond delay="0"/>
-                                  </p:stCondLst>
-                                  <p:childTnLst>
-                                    <p:set>
-                                      <p:cBhvr>
-                                        <p:cTn id="15" dur="1" fill="hold">
+                                        <p:cTn id="16" dur="1" fill="hold">
                                           <p:stCondLst>
                                             <p:cond delay="0"/>
                                           </p:stCondLst>
@@ -7658,53 +8071,9 @@
                                     </p:set>
                                     <p:animEffect transition="in" filter="fade">
                                       <p:cBhvr>
-                                        <p:cTn id="16" dur="700"/>
+                                        <p:cTn id="17" dur="900"/>
                                         <p:tgtEl>
                                           <p:spTgt spid="5"/>
-                                        </p:tgtEl>
-                                      </p:cBhvr>
-                                    </p:animEffect>
-                                  </p:childTnLst>
-                                </p:cTn>
-                              </p:par>
-                            </p:childTnLst>
-                          </p:cTn>
-                        </p:par>
-                        <p:par>
-                          <p:cTn id="22" fill="hold">
-                            <p:stCondLst>
-                              <p:cond delay="1700"/>
-                            </p:stCondLst>
-                            <p:childTnLst>
-                              <p:par>
-                                <p:cTn id="21" dur="800" fill="hold" nodeType="afterEffect" grpId="0" presetID="9" presetClass="entr" presetSubtype="0">
-                                  <p:stCondLst>
-                                    <p:cond delay="0"/>
-                                  </p:stCondLst>
-                                  <p:childTnLst>
-                                    <p:set>
-                                      <p:cBhvr>
-                                        <p:cTn id="19" dur="1" fill="hold">
-                                          <p:stCondLst>
-                                            <p:cond delay="0"/>
-                                          </p:stCondLst>
-                                        </p:cTn>
-                                        <p:tgtEl>
-                                          <p:spTgt spid="6"/>
-                                        </p:tgtEl>
-                                        <p:attrNameLst>
-                                          <p:attrName>style.visibility</p:attrName>
-                                        </p:attrNameLst>
-                                      </p:cBhvr>
-                                      <p:to>
-                                        <p:strVal val="visible"/>
-                                      </p:to>
-                                    </p:set>
-                                    <p:animEffect transition="in" filter="fade">
-                                      <p:cBhvr>
-                                        <p:cTn id="20" dur="800"/>
-                                        <p:tgtEl>
-                                          <p:spTgt spid="6"/>
                                         </p:tgtEl>
                                       </p:cBhvr>
                                     </p:animEffect>
@@ -7796,54 +8165,22 @@
           </a:p>
         </p:txBody>
       </p:sp>
-      <p:pic>
-        <p:nvPicPr>
-          <p:cNvPr id="3" name="Picture 2" descr="paint_istochnik.jpg"/>
-          <p:cNvPicPr>
-            <a:picLocks noChangeAspect="1"/>
-          </p:cNvPicPr>
+      <p:sp>
+        <p:nvSpPr>
+          <p:cNvPr id="3" name="Rectangle 2"/>
+          <p:cNvSpPr/>
           <p:nvPr/>
-        </p:nvPicPr>
-        <p:blipFill>
-          <a:blip r:embed="rId2"/>
-          <a:stretch>
-            <a:fillRect/>
-          </a:stretch>
-        </p:blipFill>
+        </p:nvSpPr>
         <p:spPr>
           <a:xfrm>
-            <a:off x="4764922" y="388620"/>
-            <a:ext cx="2662155" cy="4663440"/>
-          </a:xfrm>
-          <a:prstGeom prst="rect">
-            <a:avLst/>
-          </a:prstGeom>
-          <a:ln w="38100">
-            <a:solidFill>
-              <a:srgbClr val="C9A227"/>
-            </a:solidFill>
-          </a:ln>
-          <a:effectLst/>
-        </p:spPr>
-      </p:pic>
-      <p:sp>
-        <p:nvSpPr>
-          <p:cNvPr id="4" name="Rectangle 3"/>
-          <p:cNvSpPr/>
-          <p:nvPr/>
-        </p:nvSpPr>
-        <p:spPr>
-          <a:xfrm>
-            <a:off x="0" y="5440680"/>
-            <a:ext cx="12192000" cy="1417320"/>
+            <a:off x="4480560" y="1828800"/>
+            <a:ext cx="3200400" cy="50800"/>
           </a:xfrm>
           <a:prstGeom prst="rect">
             <a:avLst/>
           </a:prstGeom>
           <a:solidFill>
-            <a:srgbClr val="050814">
-              <a:alpha val="62000"/>
-            </a:srgbClr>
+            <a:srgbClr val="C9A227"/>
           </a:solidFill>
           <a:ln>
             <a:noFill/>
@@ -7874,14 +8211,14 @@
       </p:sp>
       <p:sp>
         <p:nvSpPr>
-          <p:cNvPr id="5" name="TextBox 4"/>
+          <p:cNvPr id="4" name="TextBox 3"/>
           <p:cNvSpPr txBox="1"/>
           <p:nvPr/>
         </p:nvSpPr>
         <p:spPr>
           <a:xfrm>
-            <a:off x="548640" y="5486400"/>
-            <a:ext cx="11091672" cy="1325880"/>
+            <a:off x="914400" y="2103120"/>
+            <a:ext cx="10360152" cy="1463040"/>
           </a:xfrm>
           <a:prstGeom prst="rect">
             <a:avLst/>
@@ -7889,59 +8226,121 @@
           <a:noFill/>
         </p:spPr>
         <p:txBody>
-          <a:bodyPr wrap="square" anchor="ctr">
+          <a:bodyPr wrap="square" anchor="t">
             <a:spAutoFit/>
           </a:bodyPr>
           <a:lstStyle/>
           <a:p>
             <a:pPr algn="ctr"/>
             <a:r>
-              <a:rPr sz="2000" b="1" i="0">
+              <a:rPr sz="5800" b="1" i="0">
+                <a:solidFill>
+                  <a:srgbClr val="C9A227"/>
+                </a:solidFill>
+                <a:latin typeface="Calibri"/>
+              </a:rPr>
+              <a:t>«Ирон фæндыр»</a:t>
+            </a:r>
+          </a:p>
+        </p:txBody>
+      </p:sp>
+      <p:sp>
+        <p:nvSpPr>
+          <p:cNvPr id="5" name="TextBox 4"/>
+          <p:cNvSpPr txBox="1"/>
+          <p:nvPr/>
+        </p:nvSpPr>
+        <p:spPr>
+          <a:xfrm>
+            <a:off x="1371600" y="3657600"/>
+            <a:ext cx="9445752" cy="914400"/>
+          </a:xfrm>
+          <a:prstGeom prst="rect">
+            <a:avLst/>
+          </a:prstGeom>
+          <a:noFill/>
+        </p:spPr>
+        <p:txBody>
+          <a:bodyPr wrap="square" anchor="t">
+            <a:spAutoFit/>
+          </a:bodyPr>
+          <a:lstStyle/>
+          <a:p>
+            <a:pPr algn="ctr"/>
+            <a:r>
+              <a:rPr sz="1800" b="0" i="0">
                 <a:solidFill>
                   <a:srgbClr val="FFFFFF"/>
                 </a:solidFill>
                 <a:latin typeface="Calibri"/>
               </a:rPr>
-              <a:t>«К источнику»</a:t>
-            </a:r>
-          </a:p>
-          <a:p>
-            <a:pPr algn="ctr">
-              <a:spcBef>
-                <a:spcPts val="300"/>
-              </a:spcBef>
-            </a:pPr>
-            <a:r>
-              <a:rPr sz="1300" b="0" i="0">
+              <a:t>«Осетинская лира», 1899 — первый сборник осетинской поэзии,</a:t>
+            </a:r>
+          </a:p>
+          <a:p>
+            <a:pPr algn="ctr"/>
+            <a:r>
+              <a:rPr sz="1800" b="0" i="0">
                 <a:solidFill>
-                  <a:srgbClr val="D8CEBE"/>
+                  <a:srgbClr val="FFFFFF"/>
                 </a:solidFill>
                 <a:latin typeface="Calibri"/>
               </a:rPr>
-              <a:t>холст, масло — Северо-Осетинский художественный музей</a:t>
-            </a:r>
-          </a:p>
-          <a:p>
-            <a:pPr algn="ctr">
-              <a:spcBef>
-                <a:spcPts val="300"/>
-              </a:spcBef>
-            </a:pPr>
-            <a:r>
-              <a:rPr sz="1300" b="0" i="0">
+              <a:t>с него начинается осетинская литература и литературный язык</a:t>
+            </a:r>
+          </a:p>
+        </p:txBody>
+      </p:sp>
+      <p:sp>
+        <p:nvSpPr>
+          <p:cNvPr id="6" name="TextBox 5"/>
+          <p:cNvSpPr txBox="1"/>
+          <p:nvPr/>
+        </p:nvSpPr>
+        <p:spPr>
+          <a:xfrm>
+            <a:off x="1371600" y="4709160"/>
+            <a:ext cx="9445752" cy="822960"/>
+          </a:xfrm>
+          <a:prstGeom prst="rect">
+            <a:avLst/>
+          </a:prstGeom>
+          <a:noFill/>
+        </p:spPr>
+        <p:txBody>
+          <a:bodyPr wrap="square" anchor="t">
+            <a:spAutoFit/>
+          </a:bodyPr>
+          <a:lstStyle/>
+          <a:p>
+            <a:pPr algn="ctr"/>
+            <a:r>
+              <a:rPr sz="1400" b="0" i="0">
                 <a:solidFill>
-                  <a:srgbClr val="D8CEBE"/>
+                  <a:srgbClr val="8A8578"/>
                 </a:solidFill>
                 <a:latin typeface="Calibri"/>
               </a:rPr>
-              <a:t>Тяжёлый труд горской женщины — одна из главных тем кисти Коста.</a:t>
-            </a:r>
-          </a:p>
-        </p:txBody>
-      </p:sp>
-      <p:sp>
-        <p:nvSpPr>
-          <p:cNvPr id="6" name="TextBox 5"/>
+              <a:t>В сборнике — стихи о труде, любви и свободе, первые стихи</a:t>
+            </a:r>
+          </a:p>
+          <a:p>
+            <a:pPr algn="ctr"/>
+            <a:r>
+              <a:rPr sz="1400" b="0" i="0">
+                <a:solidFill>
+                  <a:srgbClr val="8A8578"/>
+                </a:solidFill>
+                <a:latin typeface="Calibri"/>
+              </a:rPr>
+              <a:t>для детей на осетинском; «Завещание» переведено на 108 языков</a:t>
+            </a:r>
+          </a:p>
+        </p:txBody>
+      </p:sp>
+      <p:sp>
+        <p:nvSpPr>
+          <p:cNvPr id="7" name="TextBox 6"/>
           <p:cNvSpPr txBox="1"/>
           <p:nvPr/>
         </p:nvSpPr>
@@ -7969,7 +8368,7 @@
                 </a:solidFill>
                 <a:latin typeface="Calibri"/>
               </a:rPr>
-              <a:t>06 / 14</a:t>
+              <a:t>06 / 15</a:t>
             </a:r>
           </a:p>
         </p:txBody>
@@ -7980,7 +8379,7 @@
     <a:masterClrMapping/>
   </p:clrMapOvr>
   <p:transition spd="med">
-    <p:push dir="r"/>
+    <p:split orient="horz"/>
   </p:transition>
   <p:timing>
     <p:tnLst>
@@ -7991,7 +8390,7 @@
               <p:cTn id="2" dur="indefinite" nodeType="mainSeq">
                 <p:childTnLst>
                   <p:par>
-                    <p:cTn id="19" fill="hold">
+                    <p:cTn id="23" fill="hold">
                       <p:stCondLst>
                         <p:cond delay="0"/>
                       </p:stCondLst>
@@ -8043,11 +8442,11 @@
                         <p:par>
                           <p:cTn id="10" fill="hold">
                             <p:stCondLst>
-                              <p:cond delay="150"/>
+                              <p:cond delay="200"/>
                             </p:stCondLst>
                             <p:childTnLst>
                               <p:par>
-                                <p:cTn id="9" dur="1000" fill="hold" nodeType="afterEffect" grpId="0" presetID="22" presetClass="entr" presetSubtype="2">
+                                <p:cTn id="9" dur="600" fill="hold" nodeType="afterEffect" grpId="0" presetID="22" presetClass="entr" presetSubtype="2">
                                   <p:stCondLst>
                                     <p:cond delay="0"/>
                                   </p:stCondLst>
@@ -8072,7 +8471,7 @@
                                     </p:set>
                                     <p:animEffect transition="in" filter="wipe(right)">
                                       <p:cBhvr>
-                                        <p:cTn id="8" dur="1000"/>
+                                        <p:cTn id="8" dur="600"/>
                                         <p:tgtEl>
                                           <p:spTgt spid="3"/>
                                         </p:tgtEl>
@@ -8087,11 +8486,11 @@
                         <p:par>
                           <p:cTn id="14" fill="hold">
                             <p:stCondLst>
-                              <p:cond delay="800"/>
+                              <p:cond delay="400"/>
                             </p:stCondLst>
                             <p:childTnLst>
                               <p:par>
-                                <p:cTn id="13" dur="500" fill="hold" nodeType="afterEffect" grpId="0" presetID="9" presetClass="entr" presetSubtype="0">
+                                <p:cTn id="13" dur="900" fill="hold" nodeType="afterEffect" grpId="0" presetID="22" presetClass="entr" presetSubtype="4">
                                   <p:stCondLst>
                                     <p:cond delay="0"/>
                                   </p:stCondLst>
@@ -8114,9 +8513,9 @@
                                         <p:strVal val="visible"/>
                                       </p:to>
                                     </p:set>
-                                    <p:animEffect transition="in" filter="fade">
-                                      <p:cBhvr>
-                                        <p:cTn id="12" dur="500"/>
+                                    <p:animEffect transition="in" filter="wipe(down)">
+                                      <p:cBhvr>
+                                        <p:cTn id="12" dur="900"/>
                                         <p:tgtEl>
                                           <p:spTgt spid="4"/>
                                         </p:tgtEl>
@@ -8131,7 +8530,7 @@
                         <p:par>
                           <p:cTn id="18" fill="hold">
                             <p:stCondLst>
-                              <p:cond delay="1000"/>
+                              <p:cond delay="1200"/>
                             </p:stCondLst>
                             <p:childTnLst>
                               <p:par>
@@ -8163,6 +8562,50 @@
                                         <p:cTn id="16" dur="700"/>
                                         <p:tgtEl>
                                           <p:spTgt spid="5"/>
+                                        </p:tgtEl>
+                                      </p:cBhvr>
+                                    </p:animEffect>
+                                  </p:childTnLst>
+                                </p:cTn>
+                              </p:par>
+                            </p:childTnLst>
+                          </p:cTn>
+                        </p:par>
+                        <p:par>
+                          <p:cTn id="22" fill="hold">
+                            <p:stCondLst>
+                              <p:cond delay="1700"/>
+                            </p:stCondLst>
+                            <p:childTnLst>
+                              <p:par>
+                                <p:cTn id="21" dur="800" fill="hold" nodeType="afterEffect" grpId="0" presetID="9" presetClass="entr" presetSubtype="0">
+                                  <p:stCondLst>
+                                    <p:cond delay="0"/>
+                                  </p:stCondLst>
+                                  <p:childTnLst>
+                                    <p:set>
+                                      <p:cBhvr>
+                                        <p:cTn id="19" dur="1" fill="hold">
+                                          <p:stCondLst>
+                                            <p:cond delay="0"/>
+                                          </p:stCondLst>
+                                        </p:cTn>
+                                        <p:tgtEl>
+                                          <p:spTgt spid="6"/>
+                                        </p:tgtEl>
+                                        <p:attrNameLst>
+                                          <p:attrName>style.visibility</p:attrName>
+                                        </p:attrNameLst>
+                                      </p:cBhvr>
+                                      <p:to>
+                                        <p:strVal val="visible"/>
+                                      </p:to>
+                                    </p:set>
+                                    <p:animEffect transition="in" filter="fade">
+                                      <p:cBhvr>
+                                        <p:cTn id="20" dur="800"/>
+                                        <p:tgtEl>
+                                          <p:spTgt spid="6"/>
                                         </p:tgtEl>
                                       </p:cBhvr>
                                     </p:animEffect>
@@ -8256,7 +8699,7 @@
       </p:sp>
       <p:pic>
         <p:nvPicPr>
-          <p:cNvPr id="3" name="Picture 2" descr="paint_deti.jpg"/>
+          <p:cNvPr id="3" name="Picture 2" descr="paint_istochnik.jpg"/>
           <p:cNvPicPr>
             <a:picLocks noChangeAspect="1"/>
           </p:cNvPicPr>
@@ -8270,8 +8713,8 @@
         </p:blipFill>
         <p:spPr>
           <a:xfrm>
-            <a:off x="4424801" y="388620"/>
-            <a:ext cx="3342397" cy="4663440"/>
+            <a:off x="4764922" y="388620"/>
+            <a:ext cx="2662155" cy="4663440"/>
           </a:xfrm>
           <a:prstGeom prst="rect">
             <a:avLst/>
@@ -8360,7 +8803,7 @@
                 </a:solidFill>
                 <a:latin typeface="Calibri"/>
               </a:rPr>
-              <a:t>«Дети-каменщики»</a:t>
+              <a:t>«К источнику»</a:t>
             </a:r>
           </a:p>
           <a:p>
@@ -8376,7 +8819,7 @@
                 </a:solidFill>
                 <a:latin typeface="Calibri"/>
               </a:rPr>
-              <a:t>1886–1891, холст, масло, 194×139 см</a:t>
+              <a:t>холст, масло — Северо-Осетинский художественный музей</a:t>
             </a:r>
           </a:p>
           <a:p>
@@ -8392,7 +8835,7 @@
                 </a:solidFill>
                 <a:latin typeface="Calibri"/>
               </a:rPr>
-              <a:t>Незавершённый шедевр о детском труде, написанный до первой ссылки.</a:t>
+              <a:t>Тяжёлый труд горской женщины — одна из главных тем кисти Коста.</a:t>
             </a:r>
           </a:p>
         </p:txBody>
@@ -8427,7 +8870,7 @@
                 </a:solidFill>
                 <a:latin typeface="Calibri"/>
               </a:rPr>
-              <a:t>07 / 14</a:t>
+              <a:t>07 / 15</a:t>
             </a:r>
           </a:p>
         </p:txBody>
@@ -8438,7 +8881,7 @@
     <a:masterClrMapping/>
   </p:clrMapOvr>
   <p:transition spd="med">
-    <p:wipe dir="l"/>
+    <p:push dir="r"/>
   </p:transition>
   <p:timing>
     <p:tnLst>
@@ -8714,7 +9157,7 @@
       </p:sp>
       <p:pic>
         <p:nvPicPr>
-          <p:cNvPr id="3" name="Picture 2" descr="paint_stolovaya.jpg"/>
+          <p:cNvPr id="3" name="Picture 2" descr="paint_deti.jpg"/>
           <p:cNvPicPr>
             <a:picLocks noChangeAspect="1"/>
           </p:cNvPicPr>
@@ -8728,8 +9171,8 @@
         </p:blipFill>
         <p:spPr>
           <a:xfrm>
-            <a:off x="2667000" y="615920"/>
-            <a:ext cx="6857999" cy="4208839"/>
+            <a:off x="4424801" y="388620"/>
+            <a:ext cx="3342397" cy="4663440"/>
           </a:xfrm>
           <a:prstGeom prst="rect">
             <a:avLst/>
@@ -8818,7 +9261,7 @@
                 </a:solidFill>
                 <a:latin typeface="Calibri"/>
               </a:rPr>
-              <a:t>«Столовая гора»</a:t>
+              <a:t>«Дети-каменщики»</a:t>
             </a:r>
           </a:p>
           <a:p>
@@ -8834,7 +9277,7 @@
                 </a:solidFill>
                 <a:latin typeface="Calibri"/>
               </a:rPr>
-              <a:t>пейзаж, холст, масло</a:t>
+              <a:t>1886–1891, холст, масло, 194×139 см</a:t>
             </a:r>
           </a:p>
           <a:p>
@@ -8850,7 +9293,7 @@
                 </a:solidFill>
                 <a:latin typeface="Calibri"/>
               </a:rPr>
-              <a:t>Горы вокруг Владикавказа — родной пейзаж поэта.</a:t>
+              <a:t>Незавершённый шедевр о детском труде, написанный до первой ссылки.</a:t>
             </a:r>
           </a:p>
         </p:txBody>
@@ -8885,7 +9328,7 @@
                 </a:solidFill>
                 <a:latin typeface="Calibri"/>
               </a:rPr>
-              <a:t>08 / 14</a:t>
+              <a:t>08 / 15</a:t>
             </a:r>
           </a:p>
         </p:txBody>
@@ -8896,7 +9339,7 @@
     <a:masterClrMapping/>
   </p:clrMapOvr>
   <p:transition spd="med">
-    <p:strips dir="ru"/>
+    <p:wipe dir="l"/>
   </p:transition>
   <p:timing>
     <p:tnLst>
@@ -9172,7 +9615,7 @@
       </p:sp>
       <p:pic>
         <p:nvPicPr>
-          <p:cNvPr id="3" name="Picture 2" descr="paint_most.jpg"/>
+          <p:cNvPr id="3" name="Picture 2" descr="paint_stolovaya.jpg"/>
           <p:cNvPicPr>
             <a:picLocks noChangeAspect="1"/>
           </p:cNvPicPr>
@@ -9186,8 +9629,8 @@
         </p:blipFill>
         <p:spPr>
           <a:xfrm>
-            <a:off x="4996132" y="388620"/>
-            <a:ext cx="2199735" cy="4663440"/>
+            <a:off x="2667000" y="615920"/>
+            <a:ext cx="6857999" cy="4208839"/>
           </a:xfrm>
           <a:prstGeom prst="rect">
             <a:avLst/>
@@ -9276,7 +9719,7 @@
                 </a:solidFill>
                 <a:latin typeface="Calibri"/>
               </a:rPr>
-              <a:t>«Природный мост»</a:t>
+              <a:t>«Столовая гора»</a:t>
             </a:r>
           </a:p>
           <a:p>
@@ -9292,7 +9735,7 @@
                 </a:solidFill>
                 <a:latin typeface="Calibri"/>
               </a:rPr>
-              <a:t>пейзаж, холст, масло — музей им. М. С. Туганова</a:t>
+              <a:t>пейзаж, холст, масло</a:t>
             </a:r>
           </a:p>
           <a:p>
@@ -9308,7 +9751,7 @@
                 </a:solidFill>
                 <a:latin typeface="Calibri"/>
               </a:rPr>
-              <a:t>Коста исходил ущелья Кавказа и запечатлел его чудеса.</a:t>
+              <a:t>Горы вокруг Владикавказа — родной пейзаж поэта.</a:t>
             </a:r>
           </a:p>
         </p:txBody>
@@ -9343,7 +9786,7 @@
                 </a:solidFill>
                 <a:latin typeface="Calibri"/>
               </a:rPr>
-              <a:t>09 / 14</a:t>
+              <a:t>09 / 15</a:t>
             </a:r>
           </a:p>
         </p:txBody>
@@ -9354,7 +9797,7 @@
     <a:masterClrMapping/>
   </p:clrMapOvr>
   <p:transition spd="med">
-    <p:wedge/>
+    <p:strips dir="ru"/>
   </p:transition>
   <p:timing>
     <p:tnLst>

--- a/Kosta_Hetagurov.pptx
+++ b/Kosta_Hetagurov.pptx
@@ -6303,7 +6303,7 @@
       </p:sp>
       <p:pic>
         <p:nvPicPr>
-          <p:cNvPr id="3" name="Picture 2" descr="kosta_photo.jpg"/>
+          <p:cNvPr id="3" name="Picture 2" descr="photo_student_full.jpg"/>
           <p:cNvPicPr>
             <a:picLocks noChangeAspect="1"/>
           </p:cNvPicPr>
@@ -6317,8 +6317,8 @@
         </p:blipFill>
         <p:spPr>
           <a:xfrm>
-            <a:off x="1188720" y="1005840"/>
-            <a:ext cx="3273673" cy="4846320"/>
+            <a:off x="1188720" y="914400"/>
+            <a:ext cx="3119203" cy="5029200"/>
           </a:xfrm>
           <a:prstGeom prst="rect">
             <a:avLst/>
@@ -6399,6 +6399,22 @@
             <a:spAutoFit/>
           </a:bodyPr>
           <a:lstStyle/>
+          <a:p>
+            <a:pPr algn="l">
+              <a:spcAft>
+                <a:spcPts val="1000"/>
+              </a:spcAft>
+            </a:pPr>
+            <a:r>
+              <a:rPr sz="1400" b="0" i="0">
+                <a:solidFill>
+                  <a:srgbClr val="8A8578"/>
+                </a:solidFill>
+                <a:latin typeface="Calibri"/>
+              </a:rPr>
+              <a:t>На фото — молодой Коста, студент.</a:t>
+            </a:r>
+          </a:p>
           <a:p>
             <a:pPr algn="l"/>
             <a:r>
